--- a/Presentation Slides/FYP Presentation.pptx
+++ b/Presentation Slides/FYP Presentation.pptx
@@ -5,7 +5,7 @@
     <p:sldMasterId id="2147483659" r:id="rId1"/>
   </p:sldMasterIdLst>
   <p:notesMasterIdLst>
-    <p:notesMasterId r:id="rId20"/>
+    <p:notesMasterId r:id="rId23"/>
   </p:notesMasterIdLst>
   <p:sldIdLst>
     <p:sldId id="256" r:id="rId2"/>
@@ -25,24 +25,27 @@
     <p:sldId id="271" r:id="rId16"/>
     <p:sldId id="272" r:id="rId17"/>
     <p:sldId id="273" r:id="rId18"/>
-    <p:sldId id="269" r:id="rId19"/>
+    <p:sldId id="275" r:id="rId19"/>
+    <p:sldId id="276" r:id="rId20"/>
+    <p:sldId id="277" r:id="rId21"/>
+    <p:sldId id="269" r:id="rId22"/>
   </p:sldIdLst>
   <p:sldSz cx="9144000" cy="5143500" type="screen16x9"/>
   <p:notesSz cx="6858000" cy="9144000"/>
   <p:embeddedFontLst>
     <p:embeddedFont>
       <p:font typeface="Lato" panose="020F0502020204030203" pitchFamily="34" charset="0"/>
-      <p:regular r:id="rId21"/>
-      <p:bold r:id="rId22"/>
-      <p:italic r:id="rId23"/>
-      <p:boldItalic r:id="rId24"/>
+      <p:regular r:id="rId24"/>
+      <p:bold r:id="rId25"/>
+      <p:italic r:id="rId26"/>
+      <p:boldItalic r:id="rId27"/>
     </p:embeddedFont>
     <p:embeddedFont>
       <p:font typeface="Raleway" pitchFamily="2" charset="0"/>
-      <p:regular r:id="rId25"/>
-      <p:bold r:id="rId26"/>
-      <p:italic r:id="rId27"/>
-      <p:boldItalic r:id="rId28"/>
+      <p:regular r:id="rId28"/>
+      <p:bold r:id="rId29"/>
+      <p:italic r:id="rId30"/>
+      <p:boldItalic r:id="rId31"/>
     </p:embeddedFont>
   </p:embeddedFontLst>
   <p:defaultTextStyle>
@@ -293,12 +296,20 @@
 </p:presentation>
 </file>
 
+<file path=ppt/revisionInfo.xml><?xml version="1.0" encoding="utf-8"?>
+<p1510:revInfo xmlns:a="http://schemas.openxmlformats.org/drawingml/2006/main" xmlns:r="http://schemas.openxmlformats.org/officeDocument/2006/relationships" xmlns:p1510="http://schemas.microsoft.com/office/powerpoint/2015/10/main">
+  <p1510:revLst>
+    <p1510:client id="{D5A6156F-3151-4AAB-B3B7-1C2EDB7FB276}" v="7" dt="2026-06-18T05:29:08.688"/>
+  </p1510:revLst>
+</p1510:revInfo>
+</file>
+
 <file path=ppt/changesInfos/changesInfo1.xml><?xml version="1.0" encoding="utf-8"?>
 <pc:chgInfo xmlns:a="http://schemas.openxmlformats.org/drawingml/2006/main" xmlns:r="http://schemas.openxmlformats.org/officeDocument/2006/relationships" xmlns:ac="http://schemas.microsoft.com/office/drawing/2013/main/command" xmlns:pc="http://schemas.microsoft.com/office/powerpoint/2013/main/command">
   <pc:docChgLst>
     <pc:chgData name="Karthikeya Moleyar" userId="b51051ba856dafdf" providerId="LiveId" clId="{AB7CCA75-D7E2-42E3-A660-2E75CD62CFC8}"/>
-    <pc:docChg chg="undo custSel addSld modSld sldOrd">
-      <pc:chgData name="Karthikeya Moleyar" userId="b51051ba856dafdf" providerId="LiveId" clId="{AB7CCA75-D7E2-42E3-A660-2E75CD62CFC8}" dt="2026-06-17T04:59:19.991" v="1054"/>
+    <pc:docChg chg="undo custSel addSld delSld modSld sldOrd">
+      <pc:chgData name="Karthikeya Moleyar" userId="b51051ba856dafdf" providerId="LiveId" clId="{AB7CCA75-D7E2-42E3-A660-2E75CD62CFC8}" dt="2026-06-18T05:29:31.509" v="1270" actId="20577"/>
       <pc:docMkLst>
         <pc:docMk/>
       </pc:docMkLst>
@@ -480,6 +491,98 @@
             <pc:docMk/>
             <pc:sldMk cId="4283932461" sldId="273"/>
             <ac:spMk id="3" creationId="{37090587-9782-EFF9-0B52-DD4B432CEC4E}"/>
+          </ac:spMkLst>
+        </pc:spChg>
+      </pc:sldChg>
+      <pc:sldChg chg="modSp new del mod">
+        <pc:chgData name="Karthikeya Moleyar" userId="b51051ba856dafdf" providerId="LiveId" clId="{AB7CCA75-D7E2-42E3-A660-2E75CD62CFC8}" dt="2026-06-18T05:27:00.674" v="1217" actId="47"/>
+        <pc:sldMkLst>
+          <pc:docMk/>
+          <pc:sldMk cId="1186576706" sldId="274"/>
+        </pc:sldMkLst>
+        <pc:spChg chg="mod">
+          <ac:chgData name="Karthikeya Moleyar" userId="b51051ba856dafdf" providerId="LiveId" clId="{AB7CCA75-D7E2-42E3-A660-2E75CD62CFC8}" dt="2026-06-18T05:19:09.816" v="1118" actId="20577"/>
+          <ac:spMkLst>
+            <pc:docMk/>
+            <pc:sldMk cId="1186576706" sldId="274"/>
+            <ac:spMk id="2" creationId="{211B1756-B10B-1189-4FD5-8591ADDE8460}"/>
+          </ac:spMkLst>
+        </pc:spChg>
+        <pc:spChg chg="mod">
+          <ac:chgData name="Karthikeya Moleyar" userId="b51051ba856dafdf" providerId="LiveId" clId="{AB7CCA75-D7E2-42E3-A660-2E75CD62CFC8}" dt="2026-06-18T05:19:43.301" v="1185" actId="20577"/>
+          <ac:spMkLst>
+            <pc:docMk/>
+            <pc:sldMk cId="1186576706" sldId="274"/>
+            <ac:spMk id="3" creationId="{CE25906C-E6D9-1828-2056-3191913D6987}"/>
+          </ac:spMkLst>
+        </pc:spChg>
+      </pc:sldChg>
+      <pc:sldChg chg="modSp new mod">
+        <pc:chgData name="Karthikeya Moleyar" userId="b51051ba856dafdf" providerId="LiveId" clId="{AB7CCA75-D7E2-42E3-A660-2E75CD62CFC8}" dt="2026-06-18T05:26:15.608" v="1216" actId="20577"/>
+        <pc:sldMkLst>
+          <pc:docMk/>
+          <pc:sldMk cId="3303598969" sldId="275"/>
+        </pc:sldMkLst>
+        <pc:spChg chg="mod">
+          <ac:chgData name="Karthikeya Moleyar" userId="b51051ba856dafdf" providerId="LiveId" clId="{AB7CCA75-D7E2-42E3-A660-2E75CD62CFC8}" dt="2026-06-18T05:25:23.395" v="1188" actId="27636"/>
+          <ac:spMkLst>
+            <pc:docMk/>
+            <pc:sldMk cId="3303598969" sldId="275"/>
+            <ac:spMk id="2" creationId="{3851FB98-2DC0-A2EA-9A0B-BC7D0E7E1040}"/>
+          </ac:spMkLst>
+        </pc:spChg>
+        <pc:spChg chg="mod">
+          <ac:chgData name="Karthikeya Moleyar" userId="b51051ba856dafdf" providerId="LiveId" clId="{AB7CCA75-D7E2-42E3-A660-2E75CD62CFC8}" dt="2026-06-18T05:26:15.608" v="1216" actId="20577"/>
+          <ac:spMkLst>
+            <pc:docMk/>
+            <pc:sldMk cId="3303598969" sldId="275"/>
+            <ac:spMk id="3" creationId="{E0D2085B-0ACA-E630-1C78-6E0A3B9E99B6}"/>
+          </ac:spMkLst>
+        </pc:spChg>
+      </pc:sldChg>
+      <pc:sldChg chg="modSp new mod">
+        <pc:chgData name="Karthikeya Moleyar" userId="b51051ba856dafdf" providerId="LiveId" clId="{AB7CCA75-D7E2-42E3-A660-2E75CD62CFC8}" dt="2026-06-18T05:28:27.406" v="1261" actId="27636"/>
+        <pc:sldMkLst>
+          <pc:docMk/>
+          <pc:sldMk cId="1776283259" sldId="276"/>
+        </pc:sldMkLst>
+        <pc:spChg chg="mod">
+          <ac:chgData name="Karthikeya Moleyar" userId="b51051ba856dafdf" providerId="LiveId" clId="{AB7CCA75-D7E2-42E3-A660-2E75CD62CFC8}" dt="2026-06-18T05:28:13.358" v="1259" actId="20577"/>
+          <ac:spMkLst>
+            <pc:docMk/>
+            <pc:sldMk cId="1776283259" sldId="276"/>
+            <ac:spMk id="2" creationId="{77CF5CC4-DFE6-CB4D-CEFA-90E4B0223FFB}"/>
+          </ac:spMkLst>
+        </pc:spChg>
+        <pc:spChg chg="mod">
+          <ac:chgData name="Karthikeya Moleyar" userId="b51051ba856dafdf" providerId="LiveId" clId="{AB7CCA75-D7E2-42E3-A660-2E75CD62CFC8}" dt="2026-06-18T05:28:27.406" v="1261" actId="27636"/>
+          <ac:spMkLst>
+            <pc:docMk/>
+            <pc:sldMk cId="1776283259" sldId="276"/>
+            <ac:spMk id="3" creationId="{9BDC8489-073F-5BD1-EF89-0FC71E87A0FC}"/>
+          </ac:spMkLst>
+        </pc:spChg>
+      </pc:sldChg>
+      <pc:sldChg chg="modSp new mod">
+        <pc:chgData name="Karthikeya Moleyar" userId="b51051ba856dafdf" providerId="LiveId" clId="{AB7CCA75-D7E2-42E3-A660-2E75CD62CFC8}" dt="2026-06-18T05:29:31.509" v="1270" actId="20577"/>
+        <pc:sldMkLst>
+          <pc:docMk/>
+          <pc:sldMk cId="1861664270" sldId="277"/>
+        </pc:sldMkLst>
+        <pc:spChg chg="mod">
+          <ac:chgData name="Karthikeya Moleyar" userId="b51051ba856dafdf" providerId="LiveId" clId="{AB7CCA75-D7E2-42E3-A660-2E75CD62CFC8}" dt="2026-06-18T05:29:31.509" v="1270" actId="20577"/>
+          <ac:spMkLst>
+            <pc:docMk/>
+            <pc:sldMk cId="1861664270" sldId="277"/>
+            <ac:spMk id="2" creationId="{FC104081-5D1C-830C-53F2-12C049F17EC5}"/>
+          </ac:spMkLst>
+        </pc:spChg>
+        <pc:spChg chg="mod">
+          <ac:chgData name="Karthikeya Moleyar" userId="b51051ba856dafdf" providerId="LiveId" clId="{AB7CCA75-D7E2-42E3-A660-2E75CD62CFC8}" dt="2026-06-18T05:29:16.510" v="1269" actId="15"/>
+          <ac:spMkLst>
+            <pc:docMk/>
+            <pc:sldMk cId="1861664270" sldId="277"/>
+            <ac:spMk id="3" creationId="{C2E8B962-01B2-CA27-27C0-5069E98FD6C6}"/>
           </ac:spMkLst>
         </pc:spChg>
       </pc:sldChg>
@@ -10243,7 +10346,7 @@
   <p:cSld>
     <p:spTree>
       <p:nvGrpSpPr>
-        <p:cNvPr id="1" name="Shape 166"/>
+        <p:cNvPr id="1" name=""/>
         <p:cNvGrpSpPr/>
         <p:nvPr/>
       </p:nvGrpSpPr>
@@ -10257,126 +10360,306 @@
       </p:grpSpPr>
       <p:sp>
         <p:nvSpPr>
-          <p:cNvPr id="167" name="Google Shape;167;p26"/>
-          <p:cNvSpPr txBox="1">
+          <p:cNvPr id="2" name="Title 1">
+            <a:extLst>
+              <a:ext uri="{FF2B5EF4-FFF2-40B4-BE49-F238E27FC236}">
+                <a16:creationId xmlns:a16="http://schemas.microsoft.com/office/drawing/2014/main" id="{3851FB98-2DC0-A2EA-9A0B-BC7D0E7E1040}"/>
+              </a:ext>
+            </a:extLst>
+          </p:cNvPr>
+          <p:cNvSpPr>
             <a:spLocks noGrp="1"/>
           </p:cNvSpPr>
           <p:nvPr>
             <p:ph type="title"/>
           </p:nvPr>
         </p:nvSpPr>
-        <p:spPr>
-          <a:xfrm>
-            <a:off x="729450" y="1318650"/>
-            <a:ext cx="7688700" cy="535200"/>
-          </a:xfrm>
-          <a:prstGeom prst="rect">
-            <a:avLst/>
-          </a:prstGeom>
-        </p:spPr>
+        <p:spPr/>
         <p:txBody>
-          <a:bodyPr spcFirstLastPara="1" wrap="square" lIns="91425" tIns="91425" rIns="91425" bIns="91425" anchor="t" anchorCtr="0">
+          <a:bodyPr>
             <a:normAutofit fontScale="90000"/>
           </a:bodyPr>
           <a:lstStyle/>
           <a:p>
-            <a:pPr marL="0" lvl="0" indent="0" algn="l" rtl="0">
-              <a:spcBef>
-                <a:spcPts val="0"/>
-              </a:spcBef>
-              <a:spcAft>
-                <a:spcPts val="0"/>
-              </a:spcAft>
-              <a:buNone/>
-            </a:pPr>
-            <a:r>
-              <a:rPr lang="en-GB" dirty="0"/>
-              <a:t>Next Week Plans (14-20 June)</a:t>
-            </a:r>
-            <a:endParaRPr dirty="0"/>
+            <a:r>
+              <a:rPr lang="en-IN" dirty="0"/>
+              <a:t>Streaming </a:t>
+            </a:r>
+            <a:r>
+              <a:rPr lang="en-IN" dirty="0" err="1"/>
+              <a:t>SimulationArchitecture</a:t>
+            </a:r>
+            <a:br>
+              <a:rPr lang="en-IN" dirty="0"/>
+            </a:br>
+            <a:endParaRPr lang="en-IN" dirty="0"/>
           </a:p>
         </p:txBody>
       </p:sp>
       <p:sp>
         <p:nvSpPr>
-          <p:cNvPr id="168" name="Google Shape;168;p26"/>
-          <p:cNvSpPr txBox="1">
+          <p:cNvPr id="3" name="Text Placeholder 2">
+            <a:extLst>
+              <a:ext uri="{FF2B5EF4-FFF2-40B4-BE49-F238E27FC236}">
+                <a16:creationId xmlns:a16="http://schemas.microsoft.com/office/drawing/2014/main" id="{E0D2085B-0ACA-E630-1C78-6E0A3B9E99B6}"/>
+              </a:ext>
+            </a:extLst>
+          </p:cNvPr>
+          <p:cNvSpPr>
             <a:spLocks noGrp="1"/>
           </p:cNvSpPr>
           <p:nvPr>
             <p:ph type="body" idx="1"/>
           </p:nvPr>
         </p:nvSpPr>
-        <p:spPr>
-          <a:xfrm>
-            <a:off x="729450" y="2078875"/>
-            <a:ext cx="7688700" cy="2261100"/>
-          </a:xfrm>
-          <a:prstGeom prst="rect">
-            <a:avLst/>
-          </a:prstGeom>
-        </p:spPr>
+        <p:spPr/>
         <p:txBody>
-          <a:bodyPr spcFirstLastPara="1" wrap="square" lIns="91425" tIns="91425" rIns="91425" bIns="91425" anchor="t" anchorCtr="0">
-            <a:normAutofit/>
+          <a:bodyPr>
+            <a:normAutofit fontScale="92500" lnSpcReduction="20000"/>
           </a:bodyPr>
           <a:lstStyle/>
           <a:p>
-            <a:pPr marL="457200" lvl="0" indent="-311150" algn="l" rtl="0">
-              <a:spcBef>
-                <a:spcPts val="0"/>
-              </a:spcBef>
-              <a:spcAft>
-                <a:spcPts val="0"/>
-              </a:spcAft>
-              <a:buSzPts val="1300"/>
-              <a:buAutoNum type="arabicParenR"/>
-            </a:pPr>
+            <a:pPr marL="146050" indent="0">
+              <a:buNone/>
+            </a:pPr>
+            <a:r>
+              <a:rPr lang="en-IN" b="1" dirty="0"/>
+              <a:t>Data Producer (Emitter) </a:t>
+            </a:r>
             <a:r>
               <a:rPr lang="en-IN" dirty="0"/>
-              <a:t>Explore different threshold identification strategies</a:t>
-            </a:r>
-          </a:p>
-          <a:p>
-            <a:pPr marL="457200" lvl="0" indent="-311150" algn="l" rtl="0">
-              <a:spcBef>
-                <a:spcPts val="0"/>
-              </a:spcBef>
-              <a:spcAft>
-                <a:spcPts val="0"/>
-              </a:spcAft>
-              <a:buSzPts val="1300"/>
-              <a:buAutoNum type="arabicParenR"/>
-            </a:pPr>
+              <a:t>(Script: data_producer.py)</a:t>
+            </a:r>
+          </a:p>
+          <a:p>
             <a:r>
               <a:rPr lang="en-IN" dirty="0"/>
-              <a:t>Transition to Real Time Anomaly detection</a:t>
-            </a:r>
-          </a:p>
-          <a:p>
-            <a:pPr marL="457200" lvl="0" indent="-311150" algn="l" rtl="0">
-              <a:spcBef>
-                <a:spcPts val="0"/>
-              </a:spcBef>
-              <a:spcAft>
-                <a:spcPts val="0"/>
-              </a:spcAft>
-              <a:buSzPts val="1300"/>
-              <a:buAutoNum type="arabicParenR"/>
-            </a:pPr>
+              <a:t>Loads historical market data chunks row-by-row into memory buffer.</a:t>
+            </a:r>
+          </a:p>
+          <a:p>
             <a:r>
               <a:rPr lang="en-IN" dirty="0"/>
-              <a:t>Try the Statistical </a:t>
-            </a:r>
-            <a:r>
-              <a:rPr lang="en-IN"/>
-              <a:t>Tail Isolation</a:t>
-            </a:r>
-            <a:endParaRPr dirty="0"/>
+              <a:t>Streams events to downstream consumers via local TCP socket on port </a:t>
+            </a:r>
+            <a:r>
+              <a:rPr lang="en-IN" b="1" dirty="0"/>
+              <a:t>9999</a:t>
+            </a:r>
+            <a:r>
+              <a:rPr lang="en-IN" dirty="0"/>
+              <a:t>.</a:t>
+            </a:r>
+          </a:p>
+          <a:p>
+            <a:r>
+              <a:rPr lang="en-IN" dirty="0"/>
+              <a:t>Configurable flow controller delay allows customizable real-time emulation speeds.</a:t>
+            </a:r>
+          </a:p>
+          <a:p>
+            <a:endParaRPr lang="en-IN" dirty="0"/>
+          </a:p>
+          <a:p>
+            <a:pPr marL="146050" indent="0">
+              <a:buNone/>
+            </a:pPr>
+            <a:br>
+              <a:rPr lang="en-IN" b="1" dirty="0"/>
+            </a:br>
+            <a:r>
+              <a:rPr lang="en-IN" b="1" dirty="0"/>
+              <a:t>Live Consumer &amp; Detector (</a:t>
+            </a:r>
+            <a:r>
+              <a:rPr lang="en-IN" dirty="0"/>
+              <a:t>Script: data_consumer.py)</a:t>
+            </a:r>
+          </a:p>
+          <a:p>
+            <a:r>
+              <a:rPr lang="en-IN" dirty="0"/>
+              <a:t>Continuously ingests micro-streams via socket network listener.</a:t>
+            </a:r>
+          </a:p>
+          <a:p>
+            <a:r>
+              <a:rPr lang="en-IN" dirty="0"/>
+              <a:t>Maintains localized sliding rolling memory windows per ticker symbol.</a:t>
+            </a:r>
+          </a:p>
+          <a:p>
+            <a:r>
+              <a:rPr lang="en-IN" dirty="0"/>
+              <a:t>Performs instant inference using pre-trained detection models.</a:t>
+            </a:r>
+          </a:p>
+          <a:p>
+            <a:r>
+              <a:rPr lang="en-IN" dirty="0"/>
+              <a:t>Publishes real-time anomaly alerts straight to target log registries.</a:t>
+            </a:r>
+          </a:p>
+          <a:p>
+            <a:pPr marL="146050" indent="0">
+              <a:buNone/>
+            </a:pPr>
+            <a:endParaRPr lang="en-IN" dirty="0"/>
           </a:p>
         </p:txBody>
       </p:sp>
     </p:spTree>
+    <p:extLst>
+      <p:ext uri="{BB962C8B-B14F-4D97-AF65-F5344CB8AC3E}">
+        <p14:creationId xmlns:p14="http://schemas.microsoft.com/office/powerpoint/2010/main" val="3303598969"/>
+      </p:ext>
+    </p:extLst>
+  </p:cSld>
+  <p:clrMapOvr>
+    <a:masterClrMapping/>
+  </p:clrMapOvr>
+</p:sld>
+</file>
+
+<file path=ppt/slides/slide19.xml><?xml version="1.0" encoding="utf-8"?>
+<p:sld xmlns:a="http://schemas.openxmlformats.org/drawingml/2006/main" xmlns:r="http://schemas.openxmlformats.org/officeDocument/2006/relationships" xmlns:p="http://schemas.openxmlformats.org/presentationml/2006/main">
+  <p:cSld>
+    <p:spTree>
+      <p:nvGrpSpPr>
+        <p:cNvPr id="1" name=""/>
+        <p:cNvGrpSpPr/>
+        <p:nvPr/>
+      </p:nvGrpSpPr>
+      <p:grpSpPr>
+        <a:xfrm>
+          <a:off x="0" y="0"/>
+          <a:ext cx="0" cy="0"/>
+          <a:chOff x="0" y="0"/>
+          <a:chExt cx="0" cy="0"/>
+        </a:xfrm>
+      </p:grpSpPr>
+      <p:sp>
+        <p:nvSpPr>
+          <p:cNvPr id="2" name="Title 1">
+            <a:extLst>
+              <a:ext uri="{FF2B5EF4-FFF2-40B4-BE49-F238E27FC236}">
+                <a16:creationId xmlns:a16="http://schemas.microsoft.com/office/drawing/2014/main" id="{77CF5CC4-DFE6-CB4D-CEFA-90E4B0223FFB}"/>
+              </a:ext>
+            </a:extLst>
+          </p:cNvPr>
+          <p:cNvSpPr>
+            <a:spLocks noGrp="1"/>
+          </p:cNvSpPr>
+          <p:nvPr>
+            <p:ph type="title"/>
+          </p:nvPr>
+        </p:nvSpPr>
+        <p:spPr/>
+        <p:txBody>
+          <a:bodyPr>
+            <a:normAutofit fontScale="90000"/>
+          </a:bodyPr>
+          <a:lstStyle/>
+          <a:p>
+            <a:r>
+              <a:rPr lang="en-IN" dirty="0"/>
+              <a:t>Real-Time Feature Computation</a:t>
+            </a:r>
+            <a:br>
+              <a:rPr lang="en-IN" dirty="0"/>
+            </a:br>
+            <a:endParaRPr lang="en-IN" dirty="0"/>
+          </a:p>
+        </p:txBody>
+      </p:sp>
+      <p:sp>
+        <p:nvSpPr>
+          <p:cNvPr id="3" name="Text Placeholder 2">
+            <a:extLst>
+              <a:ext uri="{FF2B5EF4-FFF2-40B4-BE49-F238E27FC236}">
+                <a16:creationId xmlns:a16="http://schemas.microsoft.com/office/drawing/2014/main" id="{9BDC8489-073F-5BD1-EF89-0FC71E87A0FC}"/>
+              </a:ext>
+            </a:extLst>
+          </p:cNvPr>
+          <p:cNvSpPr>
+            <a:spLocks noGrp="1"/>
+          </p:cNvSpPr>
+          <p:nvPr>
+            <p:ph type="body" idx="1"/>
+          </p:nvPr>
+        </p:nvSpPr>
+        <p:spPr/>
+        <p:txBody>
+          <a:bodyPr>
+            <a:normAutofit lnSpcReduction="10000"/>
+          </a:bodyPr>
+          <a:lstStyle/>
+          <a:p>
+            <a:r>
+              <a:rPr lang="en-IN" b="1" dirty="0"/>
+              <a:t>Sliding Buffer Allocation</a:t>
+            </a:r>
+          </a:p>
+          <a:p>
+            <a:r>
+              <a:rPr lang="en-IN" dirty="0"/>
+              <a:t>To maintain state without storing database tables, the stream pipeline allocates static in-memory sliding windows for rolling calculations.</a:t>
+            </a:r>
+            <a:br>
+              <a:rPr lang="en-IN" dirty="0"/>
+            </a:br>
+            <a:endParaRPr lang="en-IN" dirty="0"/>
+          </a:p>
+          <a:p>
+            <a:r>
+              <a:rPr lang="en-IN" b="1" dirty="0"/>
+              <a:t>Closing Price Window</a:t>
+            </a:r>
+          </a:p>
+          <a:p>
+            <a:pPr lvl="1"/>
+            <a:r>
+              <a:rPr lang="en-IN" dirty="0"/>
+              <a:t>Tracks short-term historical deviations</a:t>
+            </a:r>
+          </a:p>
+          <a:p>
+            <a:r>
+              <a:rPr lang="en-IN" b="1" dirty="0"/>
+              <a:t>Trading Volume Window</a:t>
+            </a:r>
+          </a:p>
+          <a:p>
+            <a:pPr lvl="1"/>
+            <a:r>
+              <a:rPr lang="en-IN" dirty="0"/>
+              <a:t>Detects sudden liquidity &amp; transaction surges</a:t>
+            </a:r>
+          </a:p>
+          <a:p>
+            <a:r>
+              <a:rPr lang="en-IN" b="1" dirty="0"/>
+              <a:t>General Market State</a:t>
+            </a:r>
+          </a:p>
+          <a:p>
+            <a:pPr lvl="1"/>
+            <a:r>
+              <a:rPr lang="en-IN" dirty="0"/>
+              <a:t>Correlates asset shifts with market broad benchmark</a:t>
+            </a:r>
+          </a:p>
+          <a:p>
+            <a:endParaRPr lang="en-IN" dirty="0"/>
+          </a:p>
+        </p:txBody>
+      </p:sp>
+    </p:spTree>
+    <p:extLst>
+      <p:ext uri="{BB962C8B-B14F-4D97-AF65-F5344CB8AC3E}">
+        <p14:creationId xmlns:p14="http://schemas.microsoft.com/office/powerpoint/2010/main" val="1776283259"/>
+      </p:ext>
+    </p:extLst>
   </p:cSld>
   <p:clrMapOvr>
     <a:masterClrMapping/>
@@ -10585,6 +10868,296 @@
               <a:t>Match or improve the False Discovery Rate of the Batch Processing.</a:t>
             </a:r>
             <a:endParaRPr/>
+          </a:p>
+        </p:txBody>
+      </p:sp>
+    </p:spTree>
+  </p:cSld>
+  <p:clrMapOvr>
+    <a:masterClrMapping/>
+  </p:clrMapOvr>
+</p:sld>
+</file>
+
+<file path=ppt/slides/slide20.xml><?xml version="1.0" encoding="utf-8"?>
+<p:sld xmlns:a="http://schemas.openxmlformats.org/drawingml/2006/main" xmlns:r="http://schemas.openxmlformats.org/officeDocument/2006/relationships" xmlns:p="http://schemas.openxmlformats.org/presentationml/2006/main">
+  <p:cSld>
+    <p:spTree>
+      <p:nvGrpSpPr>
+        <p:cNvPr id="1" name=""/>
+        <p:cNvGrpSpPr/>
+        <p:nvPr/>
+      </p:nvGrpSpPr>
+      <p:grpSpPr>
+        <a:xfrm>
+          <a:off x="0" y="0"/>
+          <a:ext cx="0" cy="0"/>
+          <a:chOff x="0" y="0"/>
+          <a:chExt cx="0" cy="0"/>
+        </a:xfrm>
+      </p:grpSpPr>
+      <p:sp>
+        <p:nvSpPr>
+          <p:cNvPr id="2" name="Title 1">
+            <a:extLst>
+              <a:ext uri="{FF2B5EF4-FFF2-40B4-BE49-F238E27FC236}">
+                <a16:creationId xmlns:a16="http://schemas.microsoft.com/office/drawing/2014/main" id="{FC104081-5D1C-830C-53F2-12C049F17EC5}"/>
+              </a:ext>
+            </a:extLst>
+          </p:cNvPr>
+          <p:cNvSpPr>
+            <a:spLocks noGrp="1"/>
+          </p:cNvSpPr>
+          <p:nvPr>
+            <p:ph type="title"/>
+          </p:nvPr>
+        </p:nvSpPr>
+        <p:spPr/>
+        <p:txBody>
+          <a:bodyPr>
+            <a:normAutofit fontScale="90000"/>
+          </a:bodyPr>
+          <a:lstStyle/>
+          <a:p>
+            <a:r>
+              <a:rPr lang="en-IN" dirty="0"/>
+              <a:t>Technical Implementation &amp; Inventory</a:t>
+            </a:r>
+            <a:br>
+              <a:rPr lang="en-IN" dirty="0"/>
+            </a:br>
+            <a:endParaRPr lang="en-IN" dirty="0"/>
+          </a:p>
+        </p:txBody>
+      </p:sp>
+      <p:sp>
+        <p:nvSpPr>
+          <p:cNvPr id="3" name="Text Placeholder 2">
+            <a:extLst>
+              <a:ext uri="{FF2B5EF4-FFF2-40B4-BE49-F238E27FC236}">
+                <a16:creationId xmlns:a16="http://schemas.microsoft.com/office/drawing/2014/main" id="{C2E8B962-01B2-CA27-27C0-5069E98FD6C6}"/>
+              </a:ext>
+            </a:extLst>
+          </p:cNvPr>
+          <p:cNvSpPr>
+            <a:spLocks noGrp="1"/>
+          </p:cNvSpPr>
+          <p:nvPr>
+            <p:ph type="body" idx="1"/>
+          </p:nvPr>
+        </p:nvSpPr>
+        <p:spPr/>
+        <p:txBody>
+          <a:bodyPr/>
+          <a:lstStyle/>
+          <a:p>
+            <a:r>
+              <a:rPr lang="en-IN" b="1" dirty="0"/>
+              <a:t> Network Communication Interface</a:t>
+            </a:r>
+          </a:p>
+          <a:p>
+            <a:pPr lvl="1"/>
+            <a:r>
+              <a:rPr lang="en-IN" dirty="0"/>
+              <a:t>Encapsulated payloads are serialized to </a:t>
+            </a:r>
+            <a:r>
+              <a:rPr lang="en-IN" b="1" dirty="0"/>
+              <a:t>JSON string arrays</a:t>
+            </a:r>
+            <a:r>
+              <a:rPr lang="en-IN" dirty="0"/>
+              <a:t> and dispatched over continuous TCP sockets with standard newline (`\n`) formatting delimiters.</a:t>
+            </a:r>
+          </a:p>
+          <a:p>
+            <a:r>
+              <a:rPr lang="en-IN" b="1" dirty="0"/>
+              <a:t> Zero-Variance Feature Consistency</a:t>
+            </a:r>
+          </a:p>
+          <a:p>
+            <a:pPr lvl="1"/>
+            <a:r>
+              <a:rPr lang="en-IN" dirty="0"/>
+              <a:t>In-memory real-time sliding calculation utilizes identical formulas and standard deviations as the historic batch model, ensuring 100% test reliability.</a:t>
+            </a:r>
+          </a:p>
+          <a:p>
+            <a:r>
+              <a:rPr lang="en-IN" b="1" dirty="0"/>
+              <a:t> Output Logging &amp; Alerting</a:t>
+            </a:r>
+          </a:p>
+          <a:p>
+            <a:pPr lvl="1"/>
+            <a:r>
+              <a:rPr lang="en-IN" dirty="0"/>
+              <a:t>All detected anomalies are persistently logged to disk: logs/</a:t>
+            </a:r>
+            <a:r>
+              <a:rPr lang="en-IN" dirty="0" err="1"/>
+              <a:t>streaming_anomalies</a:t>
+            </a:r>
+            <a:r>
+              <a:rPr lang="en-IN" dirty="0"/>
+              <a:t>_*.csv.</a:t>
+            </a:r>
+          </a:p>
+          <a:p>
+            <a:endParaRPr lang="en-IN" dirty="0"/>
+          </a:p>
+        </p:txBody>
+      </p:sp>
+    </p:spTree>
+    <p:extLst>
+      <p:ext uri="{BB962C8B-B14F-4D97-AF65-F5344CB8AC3E}">
+        <p14:creationId xmlns:p14="http://schemas.microsoft.com/office/powerpoint/2010/main" val="1861664270"/>
+      </p:ext>
+    </p:extLst>
+  </p:cSld>
+  <p:clrMapOvr>
+    <a:masterClrMapping/>
+  </p:clrMapOvr>
+</p:sld>
+</file>
+
+<file path=ppt/slides/slide21.xml><?xml version="1.0" encoding="utf-8"?>
+<p:sld xmlns:a="http://schemas.openxmlformats.org/drawingml/2006/main" xmlns:r="http://schemas.openxmlformats.org/officeDocument/2006/relationships" xmlns:p="http://schemas.openxmlformats.org/presentationml/2006/main">
+  <p:cSld>
+    <p:spTree>
+      <p:nvGrpSpPr>
+        <p:cNvPr id="1" name="Shape 166"/>
+        <p:cNvGrpSpPr/>
+        <p:nvPr/>
+      </p:nvGrpSpPr>
+      <p:grpSpPr>
+        <a:xfrm>
+          <a:off x="0" y="0"/>
+          <a:ext cx="0" cy="0"/>
+          <a:chOff x="0" y="0"/>
+          <a:chExt cx="0" cy="0"/>
+        </a:xfrm>
+      </p:grpSpPr>
+      <p:sp>
+        <p:nvSpPr>
+          <p:cNvPr id="167" name="Google Shape;167;p26"/>
+          <p:cNvSpPr txBox="1">
+            <a:spLocks noGrp="1"/>
+          </p:cNvSpPr>
+          <p:nvPr>
+            <p:ph type="title"/>
+          </p:nvPr>
+        </p:nvSpPr>
+        <p:spPr>
+          <a:xfrm>
+            <a:off x="729450" y="1318650"/>
+            <a:ext cx="7688700" cy="535200"/>
+          </a:xfrm>
+          <a:prstGeom prst="rect">
+            <a:avLst/>
+          </a:prstGeom>
+        </p:spPr>
+        <p:txBody>
+          <a:bodyPr spcFirstLastPara="1" wrap="square" lIns="91425" tIns="91425" rIns="91425" bIns="91425" anchor="t" anchorCtr="0">
+            <a:normAutofit fontScale="90000"/>
+          </a:bodyPr>
+          <a:lstStyle/>
+          <a:p>
+            <a:pPr marL="0" lvl="0" indent="0" algn="l" rtl="0">
+              <a:spcBef>
+                <a:spcPts val="0"/>
+              </a:spcBef>
+              <a:spcAft>
+                <a:spcPts val="0"/>
+              </a:spcAft>
+              <a:buNone/>
+            </a:pPr>
+            <a:r>
+              <a:rPr lang="en-GB" dirty="0"/>
+              <a:t>Next Week Plans (14-20 June)</a:t>
+            </a:r>
+            <a:endParaRPr dirty="0"/>
+          </a:p>
+        </p:txBody>
+      </p:sp>
+      <p:sp>
+        <p:nvSpPr>
+          <p:cNvPr id="168" name="Google Shape;168;p26"/>
+          <p:cNvSpPr txBox="1">
+            <a:spLocks noGrp="1"/>
+          </p:cNvSpPr>
+          <p:nvPr>
+            <p:ph type="body" idx="1"/>
+          </p:nvPr>
+        </p:nvSpPr>
+        <p:spPr>
+          <a:xfrm>
+            <a:off x="729450" y="2078875"/>
+            <a:ext cx="7688700" cy="2261100"/>
+          </a:xfrm>
+          <a:prstGeom prst="rect">
+            <a:avLst/>
+          </a:prstGeom>
+        </p:spPr>
+        <p:txBody>
+          <a:bodyPr spcFirstLastPara="1" wrap="square" lIns="91425" tIns="91425" rIns="91425" bIns="91425" anchor="t" anchorCtr="0">
+            <a:normAutofit/>
+          </a:bodyPr>
+          <a:lstStyle/>
+          <a:p>
+            <a:pPr marL="457200" lvl="0" indent="-311150" algn="l" rtl="0">
+              <a:spcBef>
+                <a:spcPts val="0"/>
+              </a:spcBef>
+              <a:spcAft>
+                <a:spcPts val="0"/>
+              </a:spcAft>
+              <a:buSzPts val="1300"/>
+              <a:buAutoNum type="arabicParenR"/>
+            </a:pPr>
+            <a:r>
+              <a:rPr lang="en-IN" dirty="0"/>
+              <a:t>Explore different threshold identification strategies</a:t>
+            </a:r>
+          </a:p>
+          <a:p>
+            <a:pPr marL="457200" lvl="0" indent="-311150" algn="l" rtl="0">
+              <a:spcBef>
+                <a:spcPts val="0"/>
+              </a:spcBef>
+              <a:spcAft>
+                <a:spcPts val="0"/>
+              </a:spcAft>
+              <a:buSzPts val="1300"/>
+              <a:buAutoNum type="arabicParenR"/>
+            </a:pPr>
+            <a:r>
+              <a:rPr lang="en-IN" dirty="0"/>
+              <a:t>Transition to Real Time Anomaly detection</a:t>
+            </a:r>
+          </a:p>
+          <a:p>
+            <a:pPr marL="457200" lvl="0" indent="-311150" algn="l" rtl="0">
+              <a:spcBef>
+                <a:spcPts val="0"/>
+              </a:spcBef>
+              <a:spcAft>
+                <a:spcPts val="0"/>
+              </a:spcAft>
+              <a:buSzPts val="1300"/>
+              <a:buAutoNum type="arabicParenR"/>
+            </a:pPr>
+            <a:r>
+              <a:rPr lang="en-IN" dirty="0"/>
+              <a:t>Try the Statistical </a:t>
+            </a:r>
+            <a:r>
+              <a:rPr lang="en-IN"/>
+              <a:t>Tail Isolation</a:t>
+            </a:r>
+            <a:endParaRPr dirty="0"/>
           </a:p>
         </p:txBody>
       </p:sp>

--- a/Presentation Slides/FYP Presentation.pptx
+++ b/Presentation Slides/FYP Presentation.pptx
@@ -5,7 +5,7 @@
     <p:sldMasterId id="2147483659" r:id="rId1"/>
   </p:sldMasterIdLst>
   <p:notesMasterIdLst>
-    <p:notesMasterId r:id="rId23"/>
+    <p:notesMasterId r:id="rId25"/>
   </p:notesMasterIdLst>
   <p:sldIdLst>
     <p:sldId id="256" r:id="rId2"/>
@@ -28,24 +28,26 @@
     <p:sldId id="275" r:id="rId19"/>
     <p:sldId id="276" r:id="rId20"/>
     <p:sldId id="277" r:id="rId21"/>
-    <p:sldId id="269" r:id="rId22"/>
+    <p:sldId id="278" r:id="rId22"/>
+    <p:sldId id="279" r:id="rId23"/>
+    <p:sldId id="280" r:id="rId24"/>
   </p:sldIdLst>
   <p:sldSz cx="9144000" cy="5143500" type="screen16x9"/>
   <p:notesSz cx="6858000" cy="9144000"/>
   <p:embeddedFontLst>
     <p:embeddedFont>
       <p:font typeface="Lato" panose="020F0502020204030203" pitchFamily="34" charset="0"/>
-      <p:regular r:id="rId24"/>
-      <p:bold r:id="rId25"/>
-      <p:italic r:id="rId26"/>
-      <p:boldItalic r:id="rId27"/>
+      <p:regular r:id="rId26"/>
+      <p:bold r:id="rId27"/>
+      <p:italic r:id="rId28"/>
+      <p:boldItalic r:id="rId29"/>
     </p:embeddedFont>
     <p:embeddedFont>
       <p:font typeface="Raleway" pitchFamily="2" charset="0"/>
-      <p:regular r:id="rId28"/>
-      <p:bold r:id="rId29"/>
-      <p:italic r:id="rId30"/>
-      <p:boldItalic r:id="rId31"/>
+      <p:regular r:id="rId30"/>
+      <p:bold r:id="rId31"/>
+      <p:italic r:id="rId32"/>
+      <p:boldItalic r:id="rId33"/>
     </p:embeddedFont>
   </p:embeddedFontLst>
   <p:defaultTextStyle>
@@ -299,7 +301,7 @@
 <file path=ppt/revisionInfo.xml><?xml version="1.0" encoding="utf-8"?>
 <p1510:revInfo xmlns:a="http://schemas.openxmlformats.org/drawingml/2006/main" xmlns:r="http://schemas.openxmlformats.org/officeDocument/2006/relationships" xmlns:p1510="http://schemas.microsoft.com/office/powerpoint/2015/10/main">
   <p1510:revLst>
-    <p1510:client id="{D5A6156F-3151-4AAB-B3B7-1C2EDB7FB276}" v="7" dt="2026-06-18T05:29:08.688"/>
+    <p1510:client id="{D5A6156F-3151-4AAB-B3B7-1C2EDB7FB276}" v="12" dt="2026-06-29T11:46:35.799"/>
   </p1510:revLst>
 </p1510:revInfo>
 </file>
@@ -309,7 +311,7 @@
   <pc:docChgLst>
     <pc:chgData name="Karthikeya Moleyar" userId="b51051ba856dafdf" providerId="LiveId" clId="{AB7CCA75-D7E2-42E3-A660-2E75CD62CFC8}"/>
     <pc:docChg chg="undo custSel addSld delSld modSld sldOrd">
-      <pc:chgData name="Karthikeya Moleyar" userId="b51051ba856dafdf" providerId="LiveId" clId="{AB7CCA75-D7E2-42E3-A660-2E75CD62CFC8}" dt="2026-06-18T05:29:31.509" v="1270" actId="20577"/>
+      <pc:chgData name="Karthikeya Moleyar" userId="b51051ba856dafdf" providerId="LiveId" clId="{AB7CCA75-D7E2-42E3-A660-2E75CD62CFC8}" dt="2026-06-29T11:48:40.287" v="1610" actId="20577"/>
       <pc:docMkLst>
         <pc:docMk/>
       </pc:docMkLst>
@@ -387,28 +389,12 @@
           </ac:spMkLst>
         </pc:spChg>
       </pc:sldChg>
-      <pc:sldChg chg="modSp mod">
-        <pc:chgData name="Karthikeya Moleyar" userId="b51051ba856dafdf" providerId="LiveId" clId="{AB7CCA75-D7E2-42E3-A660-2E75CD62CFC8}" dt="2026-06-13T04:16:53.794" v="1046" actId="20577"/>
+      <pc:sldChg chg="modSp del mod">
+        <pc:chgData name="Karthikeya Moleyar" userId="b51051ba856dafdf" providerId="LiveId" clId="{AB7CCA75-D7E2-42E3-A660-2E75CD62CFC8}" dt="2026-06-29T11:39:27.965" v="1271" actId="2696"/>
         <pc:sldMkLst>
           <pc:docMk/>
           <pc:sldMk cId="0" sldId="269"/>
         </pc:sldMkLst>
-        <pc:spChg chg="mod">
-          <ac:chgData name="Karthikeya Moleyar" userId="b51051ba856dafdf" providerId="LiveId" clId="{AB7CCA75-D7E2-42E3-A660-2E75CD62CFC8}" dt="2026-06-13T04:16:29.016" v="999" actId="20577"/>
-          <ac:spMkLst>
-            <pc:docMk/>
-            <pc:sldMk cId="0" sldId="269"/>
-            <ac:spMk id="167" creationId="{00000000-0000-0000-0000-000000000000}"/>
-          </ac:spMkLst>
-        </pc:spChg>
-        <pc:spChg chg="mod">
-          <ac:chgData name="Karthikeya Moleyar" userId="b51051ba856dafdf" providerId="LiveId" clId="{AB7CCA75-D7E2-42E3-A660-2E75CD62CFC8}" dt="2026-06-13T04:16:53.794" v="1046" actId="20577"/>
-          <ac:spMkLst>
-            <pc:docMk/>
-            <pc:sldMk cId="0" sldId="269"/>
-            <ac:spMk id="168" creationId="{00000000-0000-0000-0000-000000000000}"/>
-          </ac:spMkLst>
-        </pc:spChg>
       </pc:sldChg>
       <pc:sldChg chg="modSp new mod">
         <pc:chgData name="Karthikeya Moleyar" userId="b51051ba856dafdf" providerId="LiveId" clId="{AB7CCA75-D7E2-42E3-A660-2E75CD62CFC8}" dt="2026-06-13T03:50:39.569" v="525" actId="27636"/>
@@ -494,29 +480,6 @@
           </ac:spMkLst>
         </pc:spChg>
       </pc:sldChg>
-      <pc:sldChg chg="modSp new del mod">
-        <pc:chgData name="Karthikeya Moleyar" userId="b51051ba856dafdf" providerId="LiveId" clId="{AB7CCA75-D7E2-42E3-A660-2E75CD62CFC8}" dt="2026-06-18T05:27:00.674" v="1217" actId="47"/>
-        <pc:sldMkLst>
-          <pc:docMk/>
-          <pc:sldMk cId="1186576706" sldId="274"/>
-        </pc:sldMkLst>
-        <pc:spChg chg="mod">
-          <ac:chgData name="Karthikeya Moleyar" userId="b51051ba856dafdf" providerId="LiveId" clId="{AB7CCA75-D7E2-42E3-A660-2E75CD62CFC8}" dt="2026-06-18T05:19:09.816" v="1118" actId="20577"/>
-          <ac:spMkLst>
-            <pc:docMk/>
-            <pc:sldMk cId="1186576706" sldId="274"/>
-            <ac:spMk id="2" creationId="{211B1756-B10B-1189-4FD5-8591ADDE8460}"/>
-          </ac:spMkLst>
-        </pc:spChg>
-        <pc:spChg chg="mod">
-          <ac:chgData name="Karthikeya Moleyar" userId="b51051ba856dafdf" providerId="LiveId" clId="{AB7CCA75-D7E2-42E3-A660-2E75CD62CFC8}" dt="2026-06-18T05:19:43.301" v="1185" actId="20577"/>
-          <ac:spMkLst>
-            <pc:docMk/>
-            <pc:sldMk cId="1186576706" sldId="274"/>
-            <ac:spMk id="3" creationId="{CE25906C-E6D9-1828-2056-3191913D6987}"/>
-          </ac:spMkLst>
-        </pc:spChg>
-      </pc:sldChg>
       <pc:sldChg chg="modSp new mod">
         <pc:chgData name="Karthikeya Moleyar" userId="b51051ba856dafdf" providerId="LiveId" clId="{AB7CCA75-D7E2-42E3-A660-2E75CD62CFC8}" dt="2026-06-18T05:26:15.608" v="1216" actId="20577"/>
         <pc:sldMkLst>
@@ -583,6 +546,83 @@
             <pc:docMk/>
             <pc:sldMk cId="1861664270" sldId="277"/>
             <ac:spMk id="3" creationId="{C2E8B962-01B2-CA27-27C0-5069E98FD6C6}"/>
+          </ac:spMkLst>
+        </pc:spChg>
+      </pc:sldChg>
+      <pc:sldChg chg="addSp modSp new mod">
+        <pc:chgData name="Karthikeya Moleyar" userId="b51051ba856dafdf" providerId="LiveId" clId="{AB7CCA75-D7E2-42E3-A660-2E75CD62CFC8}" dt="2026-06-29T11:48:13.442" v="1536" actId="20577"/>
+        <pc:sldMkLst>
+          <pc:docMk/>
+          <pc:sldMk cId="4161537304" sldId="278"/>
+        </pc:sldMkLst>
+        <pc:spChg chg="mod">
+          <ac:chgData name="Karthikeya Moleyar" userId="b51051ba856dafdf" providerId="LiveId" clId="{AB7CCA75-D7E2-42E3-A660-2E75CD62CFC8}" dt="2026-06-29T11:48:13.442" v="1536" actId="20577"/>
+          <ac:spMkLst>
+            <pc:docMk/>
+            <pc:sldMk cId="4161537304" sldId="278"/>
+            <ac:spMk id="2" creationId="{7AD81A39-9DCF-ADA5-2562-D081E78B06AC}"/>
+          </ac:spMkLst>
+        </pc:spChg>
+        <pc:spChg chg="mod">
+          <ac:chgData name="Karthikeya Moleyar" userId="b51051ba856dafdf" providerId="LiveId" clId="{AB7CCA75-D7E2-42E3-A660-2E75CD62CFC8}" dt="2026-06-29T11:43:29.445" v="1297" actId="20577"/>
+          <ac:spMkLst>
+            <pc:docMk/>
+            <pc:sldMk cId="4161537304" sldId="278"/>
+            <ac:spMk id="3" creationId="{E65236A6-AD77-94E4-9B70-CDC72C54AE9C}"/>
+          </ac:spMkLst>
+        </pc:spChg>
+        <pc:picChg chg="add mod">
+          <ac:chgData name="Karthikeya Moleyar" userId="b51051ba856dafdf" providerId="LiveId" clId="{AB7CCA75-D7E2-42E3-A660-2E75CD62CFC8}" dt="2026-06-29T11:43:32.210" v="1299" actId="1076"/>
+          <ac:picMkLst>
+            <pc:docMk/>
+            <pc:sldMk cId="4161537304" sldId="278"/>
+            <ac:picMk id="5" creationId="{932EF447-6450-6F01-B155-DD8DFE11A565}"/>
+          </ac:picMkLst>
+        </pc:picChg>
+      </pc:sldChg>
+      <pc:sldChg chg="modSp new mod">
+        <pc:chgData name="Karthikeya Moleyar" userId="b51051ba856dafdf" providerId="LiveId" clId="{AB7CCA75-D7E2-42E3-A660-2E75CD62CFC8}" dt="2026-06-29T11:47:20.555" v="1519" actId="20577"/>
+        <pc:sldMkLst>
+          <pc:docMk/>
+          <pc:sldMk cId="2420917024" sldId="279"/>
+        </pc:sldMkLst>
+        <pc:spChg chg="mod">
+          <ac:chgData name="Karthikeya Moleyar" userId="b51051ba856dafdf" providerId="LiveId" clId="{AB7CCA75-D7E2-42E3-A660-2E75CD62CFC8}" dt="2026-06-29T11:47:20.555" v="1519" actId="20577"/>
+          <ac:spMkLst>
+            <pc:docMk/>
+            <pc:sldMk cId="2420917024" sldId="279"/>
+            <ac:spMk id="2" creationId="{250E24C1-4AE7-66E6-4837-D055C2408853}"/>
+          </ac:spMkLst>
+        </pc:spChg>
+        <pc:spChg chg="mod">
+          <ac:chgData name="Karthikeya Moleyar" userId="b51051ba856dafdf" providerId="LiveId" clId="{AB7CCA75-D7E2-42E3-A660-2E75CD62CFC8}" dt="2026-06-29T11:44:57.506" v="1397"/>
+          <ac:spMkLst>
+            <pc:docMk/>
+            <pc:sldMk cId="2420917024" sldId="279"/>
+            <ac:spMk id="3" creationId="{4261E38A-5F37-92B0-D21B-12ABD80B34DD}"/>
+          </ac:spMkLst>
+        </pc:spChg>
+      </pc:sldChg>
+      <pc:sldChg chg="modSp new mod">
+        <pc:chgData name="Karthikeya Moleyar" userId="b51051ba856dafdf" providerId="LiveId" clId="{AB7CCA75-D7E2-42E3-A660-2E75CD62CFC8}" dt="2026-06-29T11:48:40.287" v="1610" actId="20577"/>
+        <pc:sldMkLst>
+          <pc:docMk/>
+          <pc:sldMk cId="1630137038" sldId="280"/>
+        </pc:sldMkLst>
+        <pc:spChg chg="mod">
+          <ac:chgData name="Karthikeya Moleyar" userId="b51051ba856dafdf" providerId="LiveId" clId="{AB7CCA75-D7E2-42E3-A660-2E75CD62CFC8}" dt="2026-06-29T11:48:30.709" v="1584" actId="20577"/>
+          <ac:spMkLst>
+            <pc:docMk/>
+            <pc:sldMk cId="1630137038" sldId="280"/>
+            <ac:spMk id="2" creationId="{B3C27781-EA86-7D85-A209-24707A9962BE}"/>
+          </ac:spMkLst>
+        </pc:spChg>
+        <pc:spChg chg="mod">
+          <ac:chgData name="Karthikeya Moleyar" userId="b51051ba856dafdf" providerId="LiveId" clId="{AB7CCA75-D7E2-42E3-A660-2E75CD62CFC8}" dt="2026-06-29T11:48:40.287" v="1610" actId="20577"/>
+          <ac:spMkLst>
+            <pc:docMk/>
+            <pc:sldMk cId="1630137038" sldId="280"/>
+            <ac:spMk id="3" creationId="{C3AC052B-3CC0-B4BC-C068-3F22FEF30484}"/>
           </ac:spMkLst>
         </pc:spChg>
       </pc:sldChg>
@@ -1509,110 +1549,6 @@
       <p:sp>
         <p:nvSpPr>
           <p:cNvPr id="159" name="Google Shape;159;g3ecf23727ab_0_35:notes"/>
-          <p:cNvSpPr txBox="1">
-            <a:spLocks noGrp="1"/>
-          </p:cNvSpPr>
-          <p:nvPr>
-            <p:ph type="body" idx="1"/>
-          </p:nvPr>
-        </p:nvSpPr>
-        <p:spPr>
-          <a:xfrm>
-            <a:off x="685800" y="4343400"/>
-            <a:ext cx="5486400" cy="4114800"/>
-          </a:xfrm>
-          <a:prstGeom prst="rect">
-            <a:avLst/>
-          </a:prstGeom>
-        </p:spPr>
-        <p:txBody>
-          <a:bodyPr spcFirstLastPara="1" wrap="square" lIns="91425" tIns="91425" rIns="91425" bIns="91425" anchor="t" anchorCtr="0">
-            <a:noAutofit/>
-          </a:bodyPr>
-          <a:lstStyle/>
-          <a:p>
-            <a:pPr marL="0" lvl="0" indent="0" algn="l" rtl="0">
-              <a:spcBef>
-                <a:spcPts val="0"/>
-              </a:spcBef>
-              <a:spcAft>
-                <a:spcPts val="0"/>
-              </a:spcAft>
-              <a:buNone/>
-            </a:pPr>
-            <a:endParaRPr/>
-          </a:p>
-        </p:txBody>
-      </p:sp>
-    </p:spTree>
-  </p:cSld>
-  <p:clrMapOvr>
-    <a:masterClrMapping/>
-  </p:clrMapOvr>
-</p:notes>
-</file>
-
-<file path=ppt/notesSlides/notesSlide14.xml><?xml version="1.0" encoding="utf-8"?>
-<p:notes xmlns:a="http://schemas.openxmlformats.org/drawingml/2006/main" xmlns:r="http://schemas.openxmlformats.org/officeDocument/2006/relationships" xmlns:p="http://schemas.openxmlformats.org/presentationml/2006/main" showMasterSp="0" showMasterPhAnim="0">
-  <p:cSld>
-    <p:spTree>
-      <p:nvGrpSpPr>
-        <p:cNvPr id="1" name="Shape 163"/>
-        <p:cNvGrpSpPr/>
-        <p:nvPr/>
-      </p:nvGrpSpPr>
-      <p:grpSpPr>
-        <a:xfrm>
-          <a:off x="0" y="0"/>
-          <a:ext cx="0" cy="0"/>
-          <a:chOff x="0" y="0"/>
-          <a:chExt cx="0" cy="0"/>
-        </a:xfrm>
-      </p:grpSpPr>
-      <p:sp>
-        <p:nvSpPr>
-          <p:cNvPr id="164" name="Google Shape;164;g3ecf23727ab_0_40:notes"/>
-          <p:cNvSpPr>
-            <a:spLocks noGrp="1" noRot="1" noChangeAspect="1"/>
-          </p:cNvSpPr>
-          <p:nvPr>
-            <p:ph type="sldImg" idx="2"/>
-          </p:nvPr>
-        </p:nvSpPr>
-        <p:spPr>
-          <a:xfrm>
-            <a:off x="381000" y="685800"/>
-            <a:ext cx="6096000" cy="3429000"/>
-          </a:xfrm>
-          <a:custGeom>
-            <a:avLst/>
-            <a:gdLst/>
-            <a:ahLst/>
-            <a:cxnLst/>
-            <a:rect l="l" t="t" r="r" b="b"/>
-            <a:pathLst>
-              <a:path w="120000" h="120000" extrusionOk="0">
-                <a:moveTo>
-                  <a:pt x="0" y="0"/>
-                </a:moveTo>
-                <a:lnTo>
-                  <a:pt x="120000" y="0"/>
-                </a:lnTo>
-                <a:lnTo>
-                  <a:pt x="120000" y="120000"/>
-                </a:lnTo>
-                <a:lnTo>
-                  <a:pt x="0" y="120000"/>
-                </a:lnTo>
-                <a:close/>
-              </a:path>
-            </a:pathLst>
-          </a:custGeom>
-        </p:spPr>
-      </p:sp>
-      <p:sp>
-        <p:nvSpPr>
-          <p:cNvPr id="165" name="Google Shape;165;g3ecf23727ab_0_40:notes"/>
           <p:cNvSpPr txBox="1">
             <a:spLocks noGrp="1"/>
           </p:cNvSpPr>
@@ -11028,7 +10964,7 @@
   <p:cSld>
     <p:spTree>
       <p:nvGrpSpPr>
-        <p:cNvPr id="1" name="Shape 166"/>
+        <p:cNvPr id="1" name=""/>
         <p:cNvGrpSpPr/>
         <p:nvPr/>
       </p:nvGrpSpPr>
@@ -11042,126 +10978,309 @@
       </p:grpSpPr>
       <p:sp>
         <p:nvSpPr>
-          <p:cNvPr id="167" name="Google Shape;167;p26"/>
-          <p:cNvSpPr txBox="1">
+          <p:cNvPr id="2" name="Title 1">
+            <a:extLst>
+              <a:ext uri="{FF2B5EF4-FFF2-40B4-BE49-F238E27FC236}">
+                <a16:creationId xmlns:a16="http://schemas.microsoft.com/office/drawing/2014/main" id="{7AD81A39-9DCF-ADA5-2562-D081E78B06AC}"/>
+              </a:ext>
+            </a:extLst>
+          </p:cNvPr>
+          <p:cNvSpPr>
             <a:spLocks noGrp="1"/>
           </p:cNvSpPr>
           <p:nvPr>
             <p:ph type="title"/>
           </p:nvPr>
         </p:nvSpPr>
-        <p:spPr>
-          <a:xfrm>
-            <a:off x="729450" y="1318650"/>
-            <a:ext cx="7688700" cy="535200"/>
-          </a:xfrm>
-          <a:prstGeom prst="rect">
-            <a:avLst/>
-          </a:prstGeom>
-        </p:spPr>
+        <p:spPr/>
         <p:txBody>
-          <a:bodyPr spcFirstLastPara="1" wrap="square" lIns="91425" tIns="91425" rIns="91425" bIns="91425" anchor="t" anchorCtr="0">
+          <a:bodyPr>
             <a:normAutofit fontScale="90000"/>
           </a:bodyPr>
           <a:lstStyle/>
           <a:p>
-            <a:pPr marL="0" lvl="0" indent="0" algn="l" rtl="0">
-              <a:spcBef>
-                <a:spcPts val="0"/>
-              </a:spcBef>
-              <a:spcAft>
-                <a:spcPts val="0"/>
-              </a:spcAft>
-              <a:buNone/>
-            </a:pPr>
-            <a:r>
-              <a:rPr lang="en-GB" dirty="0"/>
-              <a:t>Next Week Plans (14-20 June)</a:t>
-            </a:r>
-            <a:endParaRPr dirty="0"/>
+            <a:r>
+              <a:rPr lang="en-IN" dirty="0"/>
+              <a:t>Experiment with LOF and OCSVM</a:t>
+            </a:r>
           </a:p>
         </p:txBody>
       </p:sp>
       <p:sp>
         <p:nvSpPr>
-          <p:cNvPr id="168" name="Google Shape;168;p26"/>
-          <p:cNvSpPr txBox="1">
+          <p:cNvPr id="3" name="Text Placeholder 2">
+            <a:extLst>
+              <a:ext uri="{FF2B5EF4-FFF2-40B4-BE49-F238E27FC236}">
+                <a16:creationId xmlns:a16="http://schemas.microsoft.com/office/drawing/2014/main" id="{E65236A6-AD77-94E4-9B70-CDC72C54AE9C}"/>
+              </a:ext>
+            </a:extLst>
+          </p:cNvPr>
+          <p:cNvSpPr>
             <a:spLocks noGrp="1"/>
           </p:cNvSpPr>
           <p:nvPr>
             <p:ph type="body" idx="1"/>
           </p:nvPr>
         </p:nvSpPr>
+        <p:spPr/>
+        <p:txBody>
+          <a:bodyPr/>
+          <a:lstStyle/>
+          <a:p>
+            <a:r>
+              <a:rPr lang="en-IN" dirty="0"/>
+              <a:t>Configured LOF with 20 </a:t>
+            </a:r>
+            <a:r>
+              <a:rPr lang="en-IN" dirty="0" err="1"/>
+              <a:t>neighbors</a:t>
+            </a:r>
+            <a:r>
+              <a:rPr lang="en-IN" dirty="0"/>
+              <a:t> and automated contamination thresholding over the 7-feature core matrix.</a:t>
+            </a:r>
+          </a:p>
+          <a:p>
+            <a:endParaRPr lang="en-IN" dirty="0"/>
+          </a:p>
+          <a:p>
+            <a:endParaRPr lang="en-IN" dirty="0"/>
+          </a:p>
+        </p:txBody>
+      </p:sp>
+      <p:pic>
+        <p:nvPicPr>
+          <p:cNvPr id="5" name="Picture 4">
+            <a:extLst>
+              <a:ext uri="{FF2B5EF4-FFF2-40B4-BE49-F238E27FC236}">
+                <a16:creationId xmlns:a16="http://schemas.microsoft.com/office/drawing/2014/main" id="{932EF447-6450-6F01-B155-DD8DFE11A565}"/>
+              </a:ext>
+            </a:extLst>
+          </p:cNvPr>
+          <p:cNvPicPr>
+            <a:picLocks noChangeAspect="1"/>
+          </p:cNvPicPr>
+          <p:nvPr/>
+        </p:nvPicPr>
+        <p:blipFill>
+          <a:blip r:embed="rId2"/>
+          <a:stretch>
+            <a:fillRect/>
+          </a:stretch>
+        </p:blipFill>
         <p:spPr>
           <a:xfrm>
-            <a:off x="729450" y="2078875"/>
-            <a:ext cx="7688700" cy="2261100"/>
+            <a:off x="1965041" y="2754540"/>
+            <a:ext cx="4054191" cy="2072820"/>
           </a:xfrm>
           <a:prstGeom prst="rect">
             <a:avLst/>
           </a:prstGeom>
         </p:spPr>
+      </p:pic>
+    </p:spTree>
+    <p:extLst>
+      <p:ext uri="{BB962C8B-B14F-4D97-AF65-F5344CB8AC3E}">
+        <p14:creationId xmlns:p14="http://schemas.microsoft.com/office/powerpoint/2010/main" val="4161537304"/>
+      </p:ext>
+    </p:extLst>
+  </p:cSld>
+  <p:clrMapOvr>
+    <a:masterClrMapping/>
+  </p:clrMapOvr>
+</p:sld>
+</file>
+
+<file path=ppt/slides/slide22.xml><?xml version="1.0" encoding="utf-8"?>
+<p:sld xmlns:a="http://schemas.openxmlformats.org/drawingml/2006/main" xmlns:r="http://schemas.openxmlformats.org/officeDocument/2006/relationships" xmlns:p="http://schemas.openxmlformats.org/presentationml/2006/main">
+  <p:cSld>
+    <p:spTree>
+      <p:nvGrpSpPr>
+        <p:cNvPr id="1" name=""/>
+        <p:cNvGrpSpPr/>
+        <p:nvPr/>
+      </p:nvGrpSpPr>
+      <p:grpSpPr>
+        <a:xfrm>
+          <a:off x="0" y="0"/>
+          <a:ext cx="0" cy="0"/>
+          <a:chOff x="0" y="0"/>
+          <a:chExt cx="0" cy="0"/>
+        </a:xfrm>
+      </p:grpSpPr>
+      <p:sp>
+        <p:nvSpPr>
+          <p:cNvPr id="2" name="Title 1">
+            <a:extLst>
+              <a:ext uri="{FF2B5EF4-FFF2-40B4-BE49-F238E27FC236}">
+                <a16:creationId xmlns:a16="http://schemas.microsoft.com/office/drawing/2014/main" id="{250E24C1-4AE7-66E6-4837-D055C2408853}"/>
+              </a:ext>
+            </a:extLst>
+          </p:cNvPr>
+          <p:cNvSpPr>
+            <a:spLocks noGrp="1"/>
+          </p:cNvSpPr>
+          <p:nvPr>
+            <p:ph type="title"/>
+          </p:nvPr>
+        </p:nvSpPr>
+        <p:spPr/>
         <p:txBody>
-          <a:bodyPr spcFirstLastPara="1" wrap="square" lIns="91425" tIns="91425" rIns="91425" bIns="91425" anchor="t" anchorCtr="0">
-            <a:normAutofit/>
+          <a:bodyPr>
+            <a:normAutofit fontScale="90000"/>
           </a:bodyPr>
           <a:lstStyle/>
           <a:p>
-            <a:pPr marL="457200" lvl="0" indent="-311150" algn="l" rtl="0">
-              <a:spcBef>
-                <a:spcPts val="0"/>
-              </a:spcBef>
-              <a:spcAft>
-                <a:spcPts val="0"/>
-              </a:spcAft>
-              <a:buSzPts val="1300"/>
-              <a:buAutoNum type="arabicParenR"/>
-            </a:pPr>
             <a:r>
               <a:rPr lang="en-IN" dirty="0"/>
-              <a:t>Explore different threshold identification strategies</a:t>
-            </a:r>
-          </a:p>
-          <a:p>
-            <a:pPr marL="457200" lvl="0" indent="-311150" algn="l" rtl="0">
-              <a:spcBef>
-                <a:spcPts val="0"/>
-              </a:spcBef>
-              <a:spcAft>
-                <a:spcPts val="0"/>
-              </a:spcAft>
-              <a:buSzPts val="1300"/>
-              <a:buAutoNum type="arabicParenR"/>
-            </a:pPr>
+              <a:t>Result of LOF and OCSVM</a:t>
+            </a:r>
+          </a:p>
+        </p:txBody>
+      </p:sp>
+      <p:sp>
+        <p:nvSpPr>
+          <p:cNvPr id="3" name="Text Placeholder 2">
+            <a:extLst>
+              <a:ext uri="{FF2B5EF4-FFF2-40B4-BE49-F238E27FC236}">
+                <a16:creationId xmlns:a16="http://schemas.microsoft.com/office/drawing/2014/main" id="{4261E38A-5F37-92B0-D21B-12ABD80B34DD}"/>
+              </a:ext>
+            </a:extLst>
+          </p:cNvPr>
+          <p:cNvSpPr>
+            <a:spLocks noGrp="1"/>
+          </p:cNvSpPr>
+          <p:nvPr>
+            <p:ph type="body" idx="1"/>
+          </p:nvPr>
+        </p:nvSpPr>
+        <p:spPr/>
+        <p:txBody>
+          <a:bodyPr/>
+          <a:lstStyle/>
+          <a:p>
             <a:r>
               <a:rPr lang="en-IN" dirty="0"/>
-              <a:t>Transition to Real Time Anomaly detection</a:t>
-            </a:r>
-          </a:p>
-          <a:p>
-            <a:pPr marL="457200" lvl="0" indent="-311150" algn="l" rtl="0">
-              <a:spcBef>
-                <a:spcPts val="0"/>
-              </a:spcBef>
-              <a:spcAft>
-                <a:spcPts val="0"/>
-              </a:spcAft>
-              <a:buSzPts val="1300"/>
-              <a:buAutoNum type="arabicParenR"/>
-            </a:pPr>
+              <a:t>The result is bad compared to Isolation Forest</a:t>
+            </a:r>
+          </a:p>
+          <a:p>
+            <a:pPr lvl="1"/>
+            <a:r>
+              <a:rPr lang="en-US" dirty="0"/>
+              <a:t>Isolation Forest: Precision 0.18%, Recall 78.32%, Time 11m 42s</a:t>
+            </a:r>
+          </a:p>
+          <a:p>
+            <a:pPr lvl="1"/>
+            <a:r>
+              <a:rPr lang="en-US" dirty="0"/>
+              <a:t>LOF: Precision 0.02%, Recall 45.53%, Time 90m 45s</a:t>
+            </a:r>
+            <a:endParaRPr lang="en-IN" dirty="0"/>
+          </a:p>
+          <a:p>
+            <a:endParaRPr lang="en-IN" dirty="0"/>
+          </a:p>
+          <a:p>
             <a:r>
               <a:rPr lang="en-IN" dirty="0"/>
-              <a:t>Try the Statistical </a:t>
-            </a:r>
-            <a:r>
-              <a:rPr lang="en-IN"/>
-              <a:t>Tail Isolation</a:t>
-            </a:r>
-            <a:endParaRPr dirty="0"/>
+              <a:t>LOF underperformed significantly on this feature space, yielding massive computational overhead and excessive false positives</a:t>
+            </a:r>
           </a:p>
         </p:txBody>
       </p:sp>
     </p:spTree>
+    <p:extLst>
+      <p:ext uri="{BB962C8B-B14F-4D97-AF65-F5344CB8AC3E}">
+        <p14:creationId xmlns:p14="http://schemas.microsoft.com/office/powerpoint/2010/main" val="2420917024"/>
+      </p:ext>
+    </p:extLst>
+  </p:cSld>
+  <p:clrMapOvr>
+    <a:masterClrMapping/>
+  </p:clrMapOvr>
+</p:sld>
+</file>
+
+<file path=ppt/slides/slide23.xml><?xml version="1.0" encoding="utf-8"?>
+<p:sld xmlns:a="http://schemas.openxmlformats.org/drawingml/2006/main" xmlns:r="http://schemas.openxmlformats.org/officeDocument/2006/relationships" xmlns:p="http://schemas.openxmlformats.org/presentationml/2006/main">
+  <p:cSld>
+    <p:spTree>
+      <p:nvGrpSpPr>
+        <p:cNvPr id="1" name=""/>
+        <p:cNvGrpSpPr/>
+        <p:nvPr/>
+      </p:nvGrpSpPr>
+      <p:grpSpPr>
+        <a:xfrm>
+          <a:off x="0" y="0"/>
+          <a:ext cx="0" cy="0"/>
+          <a:chOff x="0" y="0"/>
+          <a:chExt cx="0" cy="0"/>
+        </a:xfrm>
+      </p:grpSpPr>
+      <p:sp>
+        <p:nvSpPr>
+          <p:cNvPr id="2" name="Title 1">
+            <a:extLst>
+              <a:ext uri="{FF2B5EF4-FFF2-40B4-BE49-F238E27FC236}">
+                <a16:creationId xmlns:a16="http://schemas.microsoft.com/office/drawing/2014/main" id="{B3C27781-EA86-7D85-A209-24707A9962BE}"/>
+              </a:ext>
+            </a:extLst>
+          </p:cNvPr>
+          <p:cNvSpPr>
+            <a:spLocks noGrp="1"/>
+          </p:cNvSpPr>
+          <p:nvPr>
+            <p:ph type="title"/>
+          </p:nvPr>
+        </p:nvSpPr>
+        <p:spPr/>
+        <p:txBody>
+          <a:bodyPr>
+            <a:normAutofit fontScale="90000"/>
+          </a:bodyPr>
+          <a:lstStyle/>
+          <a:p>
+            <a:r>
+              <a:rPr lang="en-IN" dirty="0"/>
+              <a:t>Shift Towards Supervised Learning</a:t>
+            </a:r>
+          </a:p>
+        </p:txBody>
+      </p:sp>
+      <p:sp>
+        <p:nvSpPr>
+          <p:cNvPr id="3" name="Text Placeholder 2">
+            <a:extLst>
+              <a:ext uri="{FF2B5EF4-FFF2-40B4-BE49-F238E27FC236}">
+                <a16:creationId xmlns:a16="http://schemas.microsoft.com/office/drawing/2014/main" id="{C3AC052B-3CC0-B4BC-C068-3F22FEF30484}"/>
+              </a:ext>
+            </a:extLst>
+          </p:cNvPr>
+          <p:cNvSpPr>
+            <a:spLocks noGrp="1"/>
+          </p:cNvSpPr>
+          <p:nvPr>
+            <p:ph type="body" idx="1"/>
+          </p:nvPr>
+        </p:nvSpPr>
+        <p:spPr/>
+        <p:txBody>
+          <a:bodyPr/>
+          <a:lstStyle/>
+          <a:p>
+            <a:endParaRPr lang="en-IN" dirty="0"/>
+          </a:p>
+        </p:txBody>
+      </p:sp>
+    </p:spTree>
+    <p:extLst>
+      <p:ext uri="{BB962C8B-B14F-4D97-AF65-F5344CB8AC3E}">
+        <p14:creationId xmlns:p14="http://schemas.microsoft.com/office/powerpoint/2010/main" val="1630137038"/>
+      </p:ext>
+    </p:extLst>
   </p:cSld>
   <p:clrMapOvr>
     <a:masterClrMapping/>

--- a/Presentation Slides/FYP Presentation.pptx
+++ b/Presentation Slides/FYP Presentation.pptx
@@ -5,7 +5,7 @@
     <p:sldMasterId id="2147483659" r:id="rId1"/>
   </p:sldMasterIdLst>
   <p:notesMasterIdLst>
-    <p:notesMasterId r:id="rId25"/>
+    <p:notesMasterId r:id="rId28"/>
   </p:notesMasterIdLst>
   <p:sldIdLst>
     <p:sldId id="256" r:id="rId2"/>
@@ -31,23 +31,26 @@
     <p:sldId id="278" r:id="rId22"/>
     <p:sldId id="279" r:id="rId23"/>
     <p:sldId id="280" r:id="rId24"/>
+    <p:sldId id="282" r:id="rId25"/>
+    <p:sldId id="283" r:id="rId26"/>
+    <p:sldId id="281" r:id="rId27"/>
   </p:sldIdLst>
   <p:sldSz cx="9144000" cy="5143500" type="screen16x9"/>
   <p:notesSz cx="6858000" cy="9144000"/>
   <p:embeddedFontLst>
     <p:embeddedFont>
       <p:font typeface="Lato" panose="020F0502020204030203" pitchFamily="34" charset="0"/>
-      <p:regular r:id="rId26"/>
-      <p:bold r:id="rId27"/>
-      <p:italic r:id="rId28"/>
-      <p:boldItalic r:id="rId29"/>
+      <p:regular r:id="rId29"/>
+      <p:bold r:id="rId30"/>
+      <p:italic r:id="rId31"/>
+      <p:boldItalic r:id="rId32"/>
     </p:embeddedFont>
     <p:embeddedFont>
       <p:font typeface="Raleway" pitchFamily="2" charset="0"/>
-      <p:regular r:id="rId30"/>
-      <p:bold r:id="rId31"/>
-      <p:italic r:id="rId32"/>
-      <p:boldItalic r:id="rId33"/>
+      <p:regular r:id="rId33"/>
+      <p:bold r:id="rId34"/>
+      <p:italic r:id="rId35"/>
+      <p:boldItalic r:id="rId36"/>
     </p:embeddedFont>
   </p:embeddedFontLst>
   <p:defaultTextStyle>
@@ -301,7 +304,7 @@
 <file path=ppt/revisionInfo.xml><?xml version="1.0" encoding="utf-8"?>
 <p1510:revInfo xmlns:a="http://schemas.openxmlformats.org/drawingml/2006/main" xmlns:r="http://schemas.openxmlformats.org/officeDocument/2006/relationships" xmlns:p1510="http://schemas.microsoft.com/office/powerpoint/2015/10/main">
   <p1510:revLst>
-    <p1510:client id="{D5A6156F-3151-4AAB-B3B7-1C2EDB7FB276}" v="12" dt="2026-06-29T11:46:35.799"/>
+    <p1510:client id="{D5A6156F-3151-4AAB-B3B7-1C2EDB7FB276}" v="18" dt="2026-06-29T12:05:42.717"/>
   </p1510:revLst>
 </p1510:revInfo>
 </file>
@@ -311,7 +314,7 @@
   <pc:docChgLst>
     <pc:chgData name="Karthikeya Moleyar" userId="b51051ba856dafdf" providerId="LiveId" clId="{AB7CCA75-D7E2-42E3-A660-2E75CD62CFC8}"/>
     <pc:docChg chg="undo custSel addSld delSld modSld sldOrd">
-      <pc:chgData name="Karthikeya Moleyar" userId="b51051ba856dafdf" providerId="LiveId" clId="{AB7CCA75-D7E2-42E3-A660-2E75CD62CFC8}" dt="2026-06-29T11:48:40.287" v="1610" actId="20577"/>
+      <pc:chgData name="Karthikeya Moleyar" userId="b51051ba856dafdf" providerId="LiveId" clId="{AB7CCA75-D7E2-42E3-A660-2E75CD62CFC8}" dt="2026-06-29T12:43:01.722" v="2325" actId="20577"/>
       <pc:docMkLst>
         <pc:docMk/>
       </pc:docMkLst>
@@ -550,7 +553,7 @@
         </pc:spChg>
       </pc:sldChg>
       <pc:sldChg chg="addSp modSp new mod">
-        <pc:chgData name="Karthikeya Moleyar" userId="b51051ba856dafdf" providerId="LiveId" clId="{AB7CCA75-D7E2-42E3-A660-2E75CD62CFC8}" dt="2026-06-29T11:48:13.442" v="1536" actId="20577"/>
+        <pc:chgData name="Karthikeya Moleyar" userId="b51051ba856dafdf" providerId="LiveId" clId="{AB7CCA75-D7E2-42E3-A660-2E75CD62CFC8}" dt="2026-06-29T11:51:55.539" v="1673" actId="1076"/>
         <pc:sldMkLst>
           <pc:docMk/>
           <pc:sldMk cId="4161537304" sldId="278"/>
@@ -564,7 +567,7 @@
           </ac:spMkLst>
         </pc:spChg>
         <pc:spChg chg="mod">
-          <ac:chgData name="Karthikeya Moleyar" userId="b51051ba856dafdf" providerId="LiveId" clId="{AB7CCA75-D7E2-42E3-A660-2E75CD62CFC8}" dt="2026-06-29T11:43:29.445" v="1297" actId="20577"/>
+          <ac:chgData name="Karthikeya Moleyar" userId="b51051ba856dafdf" providerId="LiveId" clId="{AB7CCA75-D7E2-42E3-A660-2E75CD62CFC8}" dt="2026-06-29T11:51:52.718" v="1672"/>
           <ac:spMkLst>
             <pc:docMk/>
             <pc:sldMk cId="4161537304" sldId="278"/>
@@ -572,7 +575,7 @@
           </ac:spMkLst>
         </pc:spChg>
         <pc:picChg chg="add mod">
-          <ac:chgData name="Karthikeya Moleyar" userId="b51051ba856dafdf" providerId="LiveId" clId="{AB7CCA75-D7E2-42E3-A660-2E75CD62CFC8}" dt="2026-06-29T11:43:32.210" v="1299" actId="1076"/>
+          <ac:chgData name="Karthikeya Moleyar" userId="b51051ba856dafdf" providerId="LiveId" clId="{AB7CCA75-D7E2-42E3-A660-2E75CD62CFC8}" dt="2026-06-29T11:51:55.539" v="1673" actId="1076"/>
           <ac:picMkLst>
             <pc:docMk/>
             <pc:sldMk cId="4161537304" sldId="278"/>
@@ -603,8 +606,8 @@
           </ac:spMkLst>
         </pc:spChg>
       </pc:sldChg>
-      <pc:sldChg chg="modSp new mod">
-        <pc:chgData name="Karthikeya Moleyar" userId="b51051ba856dafdf" providerId="LiveId" clId="{AB7CCA75-D7E2-42E3-A660-2E75CD62CFC8}" dt="2026-06-29T11:48:40.287" v="1610" actId="20577"/>
+      <pc:sldChg chg="addSp modSp new mod">
+        <pc:chgData name="Karthikeya Moleyar" userId="b51051ba856dafdf" providerId="LiveId" clId="{AB7CCA75-D7E2-42E3-A660-2E75CD62CFC8}" dt="2026-06-29T11:53:49.027" v="1731" actId="1076"/>
         <pc:sldMkLst>
           <pc:docMk/>
           <pc:sldMk cId="1630137038" sldId="280"/>
@@ -618,13 +621,114 @@
           </ac:spMkLst>
         </pc:spChg>
         <pc:spChg chg="mod">
-          <ac:chgData name="Karthikeya Moleyar" userId="b51051ba856dafdf" providerId="LiveId" clId="{AB7CCA75-D7E2-42E3-A660-2E75CD62CFC8}" dt="2026-06-29T11:48:40.287" v="1610" actId="20577"/>
+          <ac:chgData name="Karthikeya Moleyar" userId="b51051ba856dafdf" providerId="LiveId" clId="{AB7CCA75-D7E2-42E3-A660-2E75CD62CFC8}" dt="2026-06-29T11:53:45.054" v="1729" actId="20577"/>
           <ac:spMkLst>
             <pc:docMk/>
             <pc:sldMk cId="1630137038" sldId="280"/>
             <ac:spMk id="3" creationId="{C3AC052B-3CC0-B4BC-C068-3F22FEF30484}"/>
           </ac:spMkLst>
         </pc:spChg>
+        <pc:picChg chg="add mod">
+          <ac:chgData name="Karthikeya Moleyar" userId="b51051ba856dafdf" providerId="LiveId" clId="{AB7CCA75-D7E2-42E3-A660-2E75CD62CFC8}" dt="2026-06-29T11:53:49.027" v="1731" actId="1076"/>
+          <ac:picMkLst>
+            <pc:docMk/>
+            <pc:sldMk cId="1630137038" sldId="280"/>
+            <ac:picMk id="5" creationId="{0AB5A529-501E-2519-F572-BC048B13DB02}"/>
+          </ac:picMkLst>
+        </pc:picChg>
+      </pc:sldChg>
+      <pc:sldChg chg="addSp delSp modSp new mod">
+        <pc:chgData name="Karthikeya Moleyar" userId="b51051ba856dafdf" providerId="LiveId" clId="{AB7CCA75-D7E2-42E3-A660-2E75CD62CFC8}" dt="2026-06-29T12:43:01.722" v="2325" actId="20577"/>
+        <pc:sldMkLst>
+          <pc:docMk/>
+          <pc:sldMk cId="2923701509" sldId="281"/>
+        </pc:sldMkLst>
+        <pc:spChg chg="mod">
+          <ac:chgData name="Karthikeya Moleyar" userId="b51051ba856dafdf" providerId="LiveId" clId="{AB7CCA75-D7E2-42E3-A660-2E75CD62CFC8}" dt="2026-06-29T12:03:49.881" v="2059" actId="20577"/>
+          <ac:spMkLst>
+            <pc:docMk/>
+            <pc:sldMk cId="2923701509" sldId="281"/>
+            <ac:spMk id="2" creationId="{3629E79B-02A5-4A95-6233-A7C48BEDD2B2}"/>
+          </ac:spMkLst>
+        </pc:spChg>
+        <pc:spChg chg="mod">
+          <ac:chgData name="Karthikeya Moleyar" userId="b51051ba856dafdf" providerId="LiveId" clId="{AB7CCA75-D7E2-42E3-A660-2E75CD62CFC8}" dt="2026-06-29T12:43:01.722" v="2325" actId="20577"/>
+          <ac:spMkLst>
+            <pc:docMk/>
+            <pc:sldMk cId="2923701509" sldId="281"/>
+            <ac:spMk id="3" creationId="{A5967385-7EF5-732F-439B-B496A8181E71}"/>
+          </ac:spMkLst>
+        </pc:spChg>
+        <pc:picChg chg="add del mod">
+          <ac:chgData name="Karthikeya Moleyar" userId="b51051ba856dafdf" providerId="LiveId" clId="{AB7CCA75-D7E2-42E3-A660-2E75CD62CFC8}" dt="2026-06-29T12:01:39.750" v="1815" actId="478"/>
+          <ac:picMkLst>
+            <pc:docMk/>
+            <pc:sldMk cId="2923701509" sldId="281"/>
+            <ac:picMk id="5" creationId="{869CFA29-AA16-713A-84D9-2C8D1ACB017B}"/>
+          </ac:picMkLst>
+        </pc:picChg>
+      </pc:sldChg>
+      <pc:sldChg chg="modSp new mod">
+        <pc:chgData name="Karthikeya Moleyar" userId="b51051ba856dafdf" providerId="LiveId" clId="{AB7CCA75-D7E2-42E3-A660-2E75CD62CFC8}" dt="2026-06-29T11:59:01.340" v="1809" actId="20577"/>
+        <pc:sldMkLst>
+          <pc:docMk/>
+          <pc:sldMk cId="3112262530" sldId="282"/>
+        </pc:sldMkLst>
+        <pc:spChg chg="mod">
+          <ac:chgData name="Karthikeya Moleyar" userId="b51051ba856dafdf" providerId="LiveId" clId="{AB7CCA75-D7E2-42E3-A660-2E75CD62CFC8}" dt="2026-06-29T11:58:24.964" v="1775" actId="20577"/>
+          <ac:spMkLst>
+            <pc:docMk/>
+            <pc:sldMk cId="3112262530" sldId="282"/>
+            <ac:spMk id="2" creationId="{22BDE856-C63A-4B10-4CFB-33E36F7C5A6A}"/>
+          </ac:spMkLst>
+        </pc:spChg>
+        <pc:spChg chg="mod">
+          <ac:chgData name="Karthikeya Moleyar" userId="b51051ba856dafdf" providerId="LiveId" clId="{AB7CCA75-D7E2-42E3-A660-2E75CD62CFC8}" dt="2026-06-29T11:59:01.340" v="1809" actId="20577"/>
+          <ac:spMkLst>
+            <pc:docMk/>
+            <pc:sldMk cId="3112262530" sldId="282"/>
+            <ac:spMk id="3" creationId="{33A31C01-004F-967D-4EF1-6C2233BA85E8}"/>
+          </ac:spMkLst>
+        </pc:spChg>
+      </pc:sldChg>
+      <pc:sldChg chg="addSp modSp new mod">
+        <pc:chgData name="Karthikeya Moleyar" userId="b51051ba856dafdf" providerId="LiveId" clId="{AB7CCA75-D7E2-42E3-A660-2E75CD62CFC8}" dt="2026-06-29T12:06:30.064" v="2201" actId="166"/>
+        <pc:sldMkLst>
+          <pc:docMk/>
+          <pc:sldMk cId="2945472335" sldId="283"/>
+        </pc:sldMkLst>
+        <pc:spChg chg="mod">
+          <ac:chgData name="Karthikeya Moleyar" userId="b51051ba856dafdf" providerId="LiveId" clId="{AB7CCA75-D7E2-42E3-A660-2E75CD62CFC8}" dt="2026-06-29T12:01:52.544" v="1855" actId="20577"/>
+          <ac:spMkLst>
+            <pc:docMk/>
+            <pc:sldMk cId="2945472335" sldId="283"/>
+            <ac:spMk id="2" creationId="{5227D442-719C-65AA-4470-9126BECBFB17}"/>
+          </ac:spMkLst>
+        </pc:spChg>
+        <pc:spChg chg="mod">
+          <ac:chgData name="Karthikeya Moleyar" userId="b51051ba856dafdf" providerId="LiveId" clId="{AB7CCA75-D7E2-42E3-A660-2E75CD62CFC8}" dt="2026-06-29T12:03:19.991" v="1992" actId="20577"/>
+          <ac:spMkLst>
+            <pc:docMk/>
+            <pc:sldMk cId="2945472335" sldId="283"/>
+            <ac:spMk id="3" creationId="{87E0656D-9CA4-CCF0-91E8-660097AB0EB5}"/>
+          </ac:spMkLst>
+        </pc:spChg>
+        <pc:picChg chg="add mod ord">
+          <ac:chgData name="Karthikeya Moleyar" userId="b51051ba856dafdf" providerId="LiveId" clId="{AB7CCA75-D7E2-42E3-A660-2E75CD62CFC8}" dt="2026-06-29T12:06:30.064" v="2201" actId="166"/>
+          <ac:picMkLst>
+            <pc:docMk/>
+            <pc:sldMk cId="2945472335" sldId="283"/>
+            <ac:picMk id="5" creationId="{F325F47F-0086-51C3-9877-EFA8F7258E08}"/>
+          </ac:picMkLst>
+        </pc:picChg>
+        <pc:picChg chg="add mod">
+          <ac:chgData name="Karthikeya Moleyar" userId="b51051ba856dafdf" providerId="LiveId" clId="{AB7CCA75-D7E2-42E3-A660-2E75CD62CFC8}" dt="2026-06-29T12:06:24.287" v="2199" actId="1076"/>
+          <ac:picMkLst>
+            <pc:docMk/>
+            <pc:sldMk cId="2945472335" sldId="283"/>
+            <ac:picMk id="7" creationId="{FEAB387D-8C0D-9CC4-83C4-9477FDBA3194}"/>
+          </ac:picMkLst>
+        </pc:picChg>
       </pc:sldChg>
     </pc:docChg>
   </pc:docChgLst>
@@ -11041,6 +11145,45 @@
             </a:r>
           </a:p>
           <a:p>
+            <a:r>
+              <a:rPr lang="en-US" dirty="0"/>
+              <a:t>Configuration:</a:t>
+            </a:r>
+          </a:p>
+          <a:p>
+            <a:r>
+              <a:rPr lang="en-US" dirty="0"/>
+              <a:t>- </a:t>
+            </a:r>
+            <a:r>
+              <a:rPr lang="en-US" dirty="0" err="1"/>
+              <a:t>n_neighbors</a:t>
+            </a:r>
+            <a:r>
+              <a:rPr lang="en-US" dirty="0"/>
+              <a:t>: 20</a:t>
+            </a:r>
+          </a:p>
+          <a:p>
+            <a:r>
+              <a:rPr lang="en-US" dirty="0"/>
+              <a:t>- contamination: 'auto'</a:t>
+            </a:r>
+          </a:p>
+          <a:p>
+            <a:r>
+              <a:rPr lang="en-US" dirty="0"/>
+              <a:t>- Same 7 features as Isolation Forest</a:t>
+            </a:r>
+          </a:p>
+          <a:p>
+            <a:r>
+              <a:rPr lang="en-US" dirty="0"/>
+              <a:t>- ROC-based threshold optimization</a:t>
+            </a:r>
+            <a:endParaRPr lang="en-IN" dirty="0"/>
+          </a:p>
+          <a:p>
             <a:endParaRPr lang="en-IN" dirty="0"/>
           </a:p>
           <a:p>
@@ -11070,7 +11213,7 @@
         </p:blipFill>
         <p:spPr>
           <a:xfrm>
-            <a:off x="1965041" y="2754540"/>
+            <a:off x="4210153" y="2657896"/>
             <a:ext cx="4054191" cy="2072820"/>
           </a:xfrm>
           <a:prstGeom prst="rect">
@@ -11268,8 +11411,282 @@
         </p:nvSpPr>
         <p:spPr/>
         <p:txBody>
+          <a:bodyPr>
+            <a:normAutofit fontScale="92500" lnSpcReduction="20000"/>
+          </a:bodyPr>
+          <a:lstStyle/>
+          <a:p>
+            <a:r>
+              <a:rPr lang="en-IN" dirty="0"/>
+              <a:t>Created Labelled Dataset and applied Random Forest </a:t>
+            </a:r>
+          </a:p>
+          <a:p>
+            <a:endParaRPr lang="en-IN" dirty="0"/>
+          </a:p>
+          <a:p>
+            <a:r>
+              <a:rPr lang="en-IN" dirty="0"/>
+              <a:t>Configuration:</a:t>
+            </a:r>
+          </a:p>
+          <a:p>
+            <a:r>
+              <a:rPr lang="en-IN" dirty="0"/>
+              <a:t>- </a:t>
+            </a:r>
+            <a:r>
+              <a:rPr lang="en-IN" dirty="0" err="1"/>
+              <a:t>n_estimators</a:t>
+            </a:r>
+            <a:r>
+              <a:rPr lang="en-IN" dirty="0"/>
+              <a:t>: 100</a:t>
+            </a:r>
+          </a:p>
+          <a:p>
+            <a:r>
+              <a:rPr lang="en-IN" dirty="0"/>
+              <a:t>- </a:t>
+            </a:r>
+            <a:r>
+              <a:rPr lang="en-IN" dirty="0" err="1"/>
+              <a:t>max_depth</a:t>
+            </a:r>
+            <a:r>
+              <a:rPr lang="en-IN" dirty="0"/>
+              <a:t>: 15</a:t>
+            </a:r>
+          </a:p>
+          <a:p>
+            <a:r>
+              <a:rPr lang="en-IN" dirty="0"/>
+              <a:t>- </a:t>
+            </a:r>
+            <a:r>
+              <a:rPr lang="en-IN" dirty="0" err="1"/>
+              <a:t>min_samples_split</a:t>
+            </a:r>
+            <a:r>
+              <a:rPr lang="en-IN" dirty="0"/>
+              <a:t>: 10</a:t>
+            </a:r>
+          </a:p>
+          <a:p>
+            <a:r>
+              <a:rPr lang="en-IN" dirty="0"/>
+              <a:t>- </a:t>
+            </a:r>
+            <a:r>
+              <a:rPr lang="en-IN" dirty="0" err="1"/>
+              <a:t>min_samples_leaf</a:t>
+            </a:r>
+            <a:r>
+              <a:rPr lang="en-IN" dirty="0"/>
+              <a:t>: 5</a:t>
+            </a:r>
+          </a:p>
+          <a:p>
+            <a:r>
+              <a:rPr lang="en-IN" dirty="0"/>
+              <a:t>- </a:t>
+            </a:r>
+            <a:r>
+              <a:rPr lang="en-IN" dirty="0" err="1"/>
+              <a:t>class_weight</a:t>
+            </a:r>
+            <a:r>
+              <a:rPr lang="en-IN" dirty="0"/>
+              <a:t>: 'balanced'</a:t>
+            </a:r>
+          </a:p>
+          <a:p>
+            <a:r>
+              <a:rPr lang="en-IN" dirty="0"/>
+              <a:t>- </a:t>
+            </a:r>
+            <a:r>
+              <a:rPr lang="en-IN" dirty="0" err="1"/>
+              <a:t>n_jobs</a:t>
+            </a:r>
+            <a:r>
+              <a:rPr lang="en-IN" dirty="0"/>
+              <a:t>: 1 (single thread)</a:t>
+            </a:r>
+          </a:p>
+          <a:p>
+            <a:r>
+              <a:rPr lang="en-IN" dirty="0"/>
+              <a:t>- Same 7 features as Isolation Forest</a:t>
+            </a:r>
+          </a:p>
+          <a:p>
+            <a:r>
+              <a:rPr lang="en-IN" dirty="0"/>
+              <a:t>- Train/test split: 80/20 (stratified)</a:t>
+            </a:r>
+          </a:p>
+          <a:p>
+            <a:endParaRPr lang="en-IN" dirty="0"/>
+          </a:p>
+        </p:txBody>
+      </p:sp>
+      <p:pic>
+        <p:nvPicPr>
+          <p:cNvPr id="5" name="Picture 4">
+            <a:extLst>
+              <a:ext uri="{FF2B5EF4-FFF2-40B4-BE49-F238E27FC236}">
+                <a16:creationId xmlns:a16="http://schemas.microsoft.com/office/drawing/2014/main" id="{0AB5A529-501E-2519-F572-BC048B13DB02}"/>
+              </a:ext>
+            </a:extLst>
+          </p:cNvPr>
+          <p:cNvPicPr>
+            <a:picLocks noChangeAspect="1"/>
+          </p:cNvPicPr>
+          <p:nvPr/>
+        </p:nvPicPr>
+        <p:blipFill>
+          <a:blip r:embed="rId2"/>
+          <a:stretch>
+            <a:fillRect/>
+          </a:stretch>
+        </p:blipFill>
+        <p:spPr>
+          <a:xfrm>
+            <a:off x="4086091" y="2423067"/>
+            <a:ext cx="4168501" cy="2370025"/>
+          </a:xfrm>
+          <a:prstGeom prst="rect">
+            <a:avLst/>
+          </a:prstGeom>
+        </p:spPr>
+      </p:pic>
+    </p:spTree>
+    <p:extLst>
+      <p:ext uri="{BB962C8B-B14F-4D97-AF65-F5344CB8AC3E}">
+        <p14:creationId xmlns:p14="http://schemas.microsoft.com/office/powerpoint/2010/main" val="1630137038"/>
+      </p:ext>
+    </p:extLst>
+  </p:cSld>
+  <p:clrMapOvr>
+    <a:masterClrMapping/>
+  </p:clrMapOvr>
+</p:sld>
+</file>
+
+<file path=ppt/slides/slide24.xml><?xml version="1.0" encoding="utf-8"?>
+<p:sld xmlns:a="http://schemas.openxmlformats.org/drawingml/2006/main" xmlns:r="http://schemas.openxmlformats.org/officeDocument/2006/relationships" xmlns:p="http://schemas.openxmlformats.org/presentationml/2006/main">
+  <p:cSld>
+    <p:spTree>
+      <p:nvGrpSpPr>
+        <p:cNvPr id="1" name=""/>
+        <p:cNvGrpSpPr/>
+        <p:nvPr/>
+      </p:nvGrpSpPr>
+      <p:grpSpPr>
+        <a:xfrm>
+          <a:off x="0" y="0"/>
+          <a:ext cx="0" cy="0"/>
+          <a:chOff x="0" y="0"/>
+          <a:chExt cx="0" cy="0"/>
+        </a:xfrm>
+      </p:grpSpPr>
+      <p:sp>
+        <p:nvSpPr>
+          <p:cNvPr id="2" name="Title 1">
+            <a:extLst>
+              <a:ext uri="{FF2B5EF4-FFF2-40B4-BE49-F238E27FC236}">
+                <a16:creationId xmlns:a16="http://schemas.microsoft.com/office/drawing/2014/main" id="{22BDE856-C63A-4B10-4CFB-33E36F7C5A6A}"/>
+              </a:ext>
+            </a:extLst>
+          </p:cNvPr>
+          <p:cNvSpPr>
+            <a:spLocks noGrp="1"/>
+          </p:cNvSpPr>
+          <p:nvPr>
+            <p:ph type="title"/>
+          </p:nvPr>
+        </p:nvSpPr>
+        <p:spPr/>
+        <p:txBody>
+          <a:bodyPr>
+            <a:normAutofit fontScale="90000"/>
+          </a:bodyPr>
+          <a:lstStyle/>
+          <a:p>
+            <a:r>
+              <a:rPr lang="en-IN" dirty="0"/>
+              <a:t>Observations </a:t>
+            </a:r>
+          </a:p>
+        </p:txBody>
+      </p:sp>
+      <p:sp>
+        <p:nvSpPr>
+          <p:cNvPr id="3" name="Text Placeholder 2">
+            <a:extLst>
+              <a:ext uri="{FF2B5EF4-FFF2-40B4-BE49-F238E27FC236}">
+                <a16:creationId xmlns:a16="http://schemas.microsoft.com/office/drawing/2014/main" id="{33A31C01-004F-967D-4EF1-6C2233BA85E8}"/>
+              </a:ext>
+            </a:extLst>
+          </p:cNvPr>
+          <p:cNvSpPr>
+            <a:spLocks noGrp="1"/>
+          </p:cNvSpPr>
+          <p:nvPr>
+            <p:ph type="body" idx="1"/>
+          </p:nvPr>
+        </p:nvSpPr>
+        <p:spPr/>
+        <p:txBody>
           <a:bodyPr/>
           <a:lstStyle/>
+          <a:p>
+            <a:r>
+              <a:rPr lang="en-IN" b="1" dirty="0"/>
+              <a:t>Precision :</a:t>
+            </a:r>
+            <a:r>
+              <a:rPr lang="en-IN" dirty="0"/>
+              <a:t> Random Forest achieves a 100% precision score compared to Isolation Forest’s 0.18%, completely eliminating false flags.</a:t>
+            </a:r>
+          </a:p>
+          <a:p>
+            <a:r>
+              <a:rPr lang="en-IN" b="1" dirty="0"/>
+              <a:t>The Recall:</a:t>
+            </a:r>
+            <a:r>
+              <a:rPr lang="en-IN" dirty="0"/>
+              <a:t> Random Forest missed 8 out of 20 anomalies in the test set, dropping recall from 78.32% to 60.00%.</a:t>
+            </a:r>
+          </a:p>
+          <a:p>
+            <a:r>
+              <a:rPr lang="en-IN" b="1" dirty="0"/>
+              <a:t>Data Dependency:</a:t>
+            </a:r>
+            <a:r>
+              <a:rPr lang="en-IN" dirty="0"/>
+              <a:t> Random Forest requires explicit </a:t>
+            </a:r>
+            <a:r>
+              <a:rPr lang="en-IN" dirty="0" err="1"/>
+              <a:t>labeled</a:t>
+            </a:r>
+            <a:r>
+              <a:rPr lang="en-IN" dirty="0"/>
+              <a:t> history and training optimization on subsets, whereas Isolation Forest handles raw, </a:t>
+            </a:r>
+            <a:r>
+              <a:rPr lang="en-IN" dirty="0" err="1"/>
+              <a:t>unlabeled</a:t>
+            </a:r>
+            <a:r>
+              <a:rPr lang="en-IN" dirty="0"/>
+              <a:t> streams out of the box.</a:t>
+            </a:r>
+          </a:p>
           <a:p>
             <a:endParaRPr lang="en-IN" dirty="0"/>
           </a:p>
@@ -11278,7 +11695,282 @@
     </p:spTree>
     <p:extLst>
       <p:ext uri="{BB962C8B-B14F-4D97-AF65-F5344CB8AC3E}">
-        <p14:creationId xmlns:p14="http://schemas.microsoft.com/office/powerpoint/2010/main" val="1630137038"/>
+        <p14:creationId xmlns:p14="http://schemas.microsoft.com/office/powerpoint/2010/main" val="3112262530"/>
+      </p:ext>
+    </p:extLst>
+  </p:cSld>
+  <p:clrMapOvr>
+    <a:masterClrMapping/>
+  </p:clrMapOvr>
+</p:sld>
+</file>
+
+<file path=ppt/slides/slide25.xml><?xml version="1.0" encoding="utf-8"?>
+<p:sld xmlns:a="http://schemas.openxmlformats.org/drawingml/2006/main" xmlns:r="http://schemas.openxmlformats.org/officeDocument/2006/relationships" xmlns:p="http://schemas.openxmlformats.org/presentationml/2006/main">
+  <p:cSld>
+    <p:spTree>
+      <p:nvGrpSpPr>
+        <p:cNvPr id="1" name=""/>
+        <p:cNvGrpSpPr/>
+        <p:nvPr/>
+      </p:nvGrpSpPr>
+      <p:grpSpPr>
+        <a:xfrm>
+          <a:off x="0" y="0"/>
+          <a:ext cx="0" cy="0"/>
+          <a:chOff x="0" y="0"/>
+          <a:chExt cx="0" cy="0"/>
+        </a:xfrm>
+      </p:grpSpPr>
+      <p:sp>
+        <p:nvSpPr>
+          <p:cNvPr id="2" name="Title 1">
+            <a:extLst>
+              <a:ext uri="{FF2B5EF4-FFF2-40B4-BE49-F238E27FC236}">
+                <a16:creationId xmlns:a16="http://schemas.microsoft.com/office/drawing/2014/main" id="{5227D442-719C-65AA-4470-9126BECBFB17}"/>
+              </a:ext>
+            </a:extLst>
+          </p:cNvPr>
+          <p:cNvSpPr>
+            <a:spLocks noGrp="1"/>
+          </p:cNvSpPr>
+          <p:nvPr>
+            <p:ph type="title"/>
+          </p:nvPr>
+        </p:nvSpPr>
+        <p:spPr/>
+        <p:txBody>
+          <a:bodyPr>
+            <a:normAutofit fontScale="90000"/>
+          </a:bodyPr>
+          <a:lstStyle/>
+          <a:p>
+            <a:r>
+              <a:rPr lang="en-IN" dirty="0"/>
+              <a:t>Supervised Learning - Streaming</a:t>
+            </a:r>
+          </a:p>
+        </p:txBody>
+      </p:sp>
+      <p:sp>
+        <p:nvSpPr>
+          <p:cNvPr id="3" name="Text Placeholder 2">
+            <a:extLst>
+              <a:ext uri="{FF2B5EF4-FFF2-40B4-BE49-F238E27FC236}">
+                <a16:creationId xmlns:a16="http://schemas.microsoft.com/office/drawing/2014/main" id="{87E0656D-9CA4-CCF0-91E8-660097AB0EB5}"/>
+              </a:ext>
+            </a:extLst>
+          </p:cNvPr>
+          <p:cNvSpPr>
+            <a:spLocks noGrp="1"/>
+          </p:cNvSpPr>
+          <p:nvPr>
+            <p:ph type="body" idx="1"/>
+          </p:nvPr>
+        </p:nvSpPr>
+        <p:spPr/>
+        <p:txBody>
+          <a:bodyPr/>
+          <a:lstStyle/>
+          <a:p>
+            <a:r>
+              <a:rPr lang="en-IN" dirty="0"/>
+              <a:t>The trained model used on streaming data.</a:t>
+            </a:r>
+          </a:p>
+          <a:p>
+            <a:r>
+              <a:rPr lang="en-IN" dirty="0"/>
+              <a:t>The result seen in batch is transferred</a:t>
+            </a:r>
+            <a:br>
+              <a:rPr lang="en-IN" dirty="0"/>
+            </a:br>
+            <a:r>
+              <a:rPr lang="en-IN" dirty="0"/>
+              <a:t>to Streaming as well.</a:t>
+            </a:r>
+          </a:p>
+        </p:txBody>
+      </p:sp>
+      <p:pic>
+        <p:nvPicPr>
+          <p:cNvPr id="7" name="Picture 6">
+            <a:extLst>
+              <a:ext uri="{FF2B5EF4-FFF2-40B4-BE49-F238E27FC236}">
+                <a16:creationId xmlns:a16="http://schemas.microsoft.com/office/drawing/2014/main" id="{FEAB387D-8C0D-9CC4-83C4-9477FDBA3194}"/>
+              </a:ext>
+            </a:extLst>
+          </p:cNvPr>
+          <p:cNvPicPr>
+            <a:picLocks noChangeAspect="1"/>
+          </p:cNvPicPr>
+          <p:nvPr/>
+        </p:nvPicPr>
+        <p:blipFill>
+          <a:blip r:embed="rId2"/>
+          <a:stretch>
+            <a:fillRect/>
+          </a:stretch>
+        </p:blipFill>
+        <p:spPr>
+          <a:xfrm>
+            <a:off x="201283" y="2912444"/>
+            <a:ext cx="4206605" cy="1920406"/>
+          </a:xfrm>
+          <a:prstGeom prst="rect">
+            <a:avLst/>
+          </a:prstGeom>
+        </p:spPr>
+      </p:pic>
+      <p:pic>
+        <p:nvPicPr>
+          <p:cNvPr id="5" name="Picture 4">
+            <a:extLst>
+              <a:ext uri="{FF2B5EF4-FFF2-40B4-BE49-F238E27FC236}">
+                <a16:creationId xmlns:a16="http://schemas.microsoft.com/office/drawing/2014/main" id="{F325F47F-0086-51C3-9877-EFA8F7258E08}"/>
+              </a:ext>
+            </a:extLst>
+          </p:cNvPr>
+          <p:cNvPicPr>
+            <a:picLocks noChangeAspect="1"/>
+          </p:cNvPicPr>
+          <p:nvPr/>
+        </p:nvPicPr>
+        <p:blipFill>
+          <a:blip r:embed="rId3"/>
+          <a:stretch>
+            <a:fillRect/>
+          </a:stretch>
+        </p:blipFill>
+        <p:spPr>
+          <a:xfrm>
+            <a:off x="4042994" y="2683824"/>
+            <a:ext cx="4740051" cy="2149026"/>
+          </a:xfrm>
+          <a:prstGeom prst="rect">
+            <a:avLst/>
+          </a:prstGeom>
+        </p:spPr>
+      </p:pic>
+    </p:spTree>
+    <p:extLst>
+      <p:ext uri="{BB962C8B-B14F-4D97-AF65-F5344CB8AC3E}">
+        <p14:creationId xmlns:p14="http://schemas.microsoft.com/office/powerpoint/2010/main" val="2945472335"/>
+      </p:ext>
+    </p:extLst>
+  </p:cSld>
+  <p:clrMapOvr>
+    <a:masterClrMapping/>
+  </p:clrMapOvr>
+</p:sld>
+</file>
+
+<file path=ppt/slides/slide26.xml><?xml version="1.0" encoding="utf-8"?>
+<p:sld xmlns:a="http://schemas.openxmlformats.org/drawingml/2006/main" xmlns:r="http://schemas.openxmlformats.org/officeDocument/2006/relationships" xmlns:p="http://schemas.openxmlformats.org/presentationml/2006/main">
+  <p:cSld>
+    <p:spTree>
+      <p:nvGrpSpPr>
+        <p:cNvPr id="1" name=""/>
+        <p:cNvGrpSpPr/>
+        <p:nvPr/>
+      </p:nvGrpSpPr>
+      <p:grpSpPr>
+        <a:xfrm>
+          <a:off x="0" y="0"/>
+          <a:ext cx="0" cy="0"/>
+          <a:chOff x="0" y="0"/>
+          <a:chExt cx="0" cy="0"/>
+        </a:xfrm>
+      </p:grpSpPr>
+      <p:sp>
+        <p:nvSpPr>
+          <p:cNvPr id="2" name="Title 1">
+            <a:extLst>
+              <a:ext uri="{FF2B5EF4-FFF2-40B4-BE49-F238E27FC236}">
+                <a16:creationId xmlns:a16="http://schemas.microsoft.com/office/drawing/2014/main" id="{3629E79B-02A5-4A95-6233-A7C48BEDD2B2}"/>
+              </a:ext>
+            </a:extLst>
+          </p:cNvPr>
+          <p:cNvSpPr>
+            <a:spLocks noGrp="1"/>
+          </p:cNvSpPr>
+          <p:nvPr>
+            <p:ph type="title"/>
+          </p:nvPr>
+        </p:nvSpPr>
+        <p:spPr/>
+        <p:txBody>
+          <a:bodyPr>
+            <a:normAutofit fontScale="90000"/>
+          </a:bodyPr>
+          <a:lstStyle/>
+          <a:p>
+            <a:r>
+              <a:rPr lang="en-IN" dirty="0"/>
+              <a:t>Plan for next week (28 June to 4 July)</a:t>
+            </a:r>
+          </a:p>
+        </p:txBody>
+      </p:sp>
+      <p:sp>
+        <p:nvSpPr>
+          <p:cNvPr id="3" name="Text Placeholder 2">
+            <a:extLst>
+              <a:ext uri="{FF2B5EF4-FFF2-40B4-BE49-F238E27FC236}">
+                <a16:creationId xmlns:a16="http://schemas.microsoft.com/office/drawing/2014/main" id="{A5967385-7EF5-732F-439B-B496A8181E71}"/>
+              </a:ext>
+            </a:extLst>
+          </p:cNvPr>
+          <p:cNvSpPr>
+            <a:spLocks noGrp="1"/>
+          </p:cNvSpPr>
+          <p:nvPr>
+            <p:ph type="body" idx="1"/>
+          </p:nvPr>
+        </p:nvSpPr>
+        <p:spPr/>
+        <p:txBody>
+          <a:bodyPr/>
+          <a:lstStyle/>
+          <a:p>
+            <a:r>
+              <a:rPr lang="en-IN" dirty="0"/>
+              <a:t>Current training of model was on subset of data. Will try using the entire dataset to see if it has better impact of the result</a:t>
+            </a:r>
+          </a:p>
+          <a:p>
+            <a:r>
+              <a:rPr lang="en-IN" dirty="0"/>
+              <a:t>Hyperparameter Tuning for Higher Recall</a:t>
+            </a:r>
+          </a:p>
+          <a:p>
+            <a:r>
+              <a:rPr lang="en-IN" dirty="0"/>
+              <a:t>Try getting better features</a:t>
+            </a:r>
+          </a:p>
+          <a:p>
+            <a:r>
+              <a:rPr lang="en-IN" dirty="0"/>
+              <a:t>Will try with different </a:t>
+            </a:r>
+            <a:r>
+              <a:rPr lang="en-IN"/>
+              <a:t>basic models, DL and LLM</a:t>
+            </a:r>
+            <a:endParaRPr lang="en-IN" dirty="0"/>
+          </a:p>
+          <a:p>
+            <a:endParaRPr lang="en-IN" dirty="0"/>
+          </a:p>
+        </p:txBody>
+      </p:sp>
+    </p:spTree>
+    <p:extLst>
+      <p:ext uri="{BB962C8B-B14F-4D97-AF65-F5344CB8AC3E}">
+        <p14:creationId xmlns:p14="http://schemas.microsoft.com/office/powerpoint/2010/main" val="2923701509"/>
       </p:ext>
     </p:extLst>
   </p:cSld>
